--- a/exports/pptx/lessons/primary-module-09-subtraction-nikhilam/day-01-friends-to-ten.pptx
+++ b/exports/pptx/lessons/primary-module-09-subtraction-nikhilam/day-01-friends-to-ten.pptx
@@ -16,9 +16,13 @@
     <p:sldId id="264" r:id="rId10"/>
     <p:sldId id="265" r:id="rId11"/>
     <p:sldId id="266" r:id="rId12"/>
+    <p:sldId id="267" r:id="rId13"/>
+    <p:sldId id="268" r:id="rId14"/>
+    <p:sldId id="269" r:id="rId15"/>
+    <p:sldId id="270" r:id="rId16"/>
   </p:sldIdLst>
   <p:notesMasterIdLst>
-    <p:notesMasterId r:id="rId13"/>
+    <p:notesMasterId r:id="rId17"/>
   </p:notesMasterIdLst>
   <p:sldSz cx="9144000" cy="5143500"/>
   <p:notesSz cx="5143500" cy="9144000"/>
@@ -712,6 +716,358 @@
             <a:fld id="{F7021451-1387-4CA6-816F-3879F97B5CBC}" type="slidenum">
               <a:rPr lang="en-US"/>
               <a:t>11</a:t>
+            </a:fld>
+            <a:endParaRPr lang="en-US"/>
+          </a:p>
+        </p:txBody>
+      </p:sp>
+    </p:spTree>
+    <p:extLst>
+      <p:ext uri="{BB962C8B-B14F-4D97-AF65-F5344CB8AC3E}">
+        <p14:creationId xmlns:p14="http://schemas.microsoft.com/office/powerpoint/2010/main" val="1024086991"/>
+      </p:ext>
+    </p:extLst>
+  </p:cSld>
+  <p:clrMapOvr>
+    <a:masterClrMapping/>
+  </p:clrMapOvr>
+</p:notes>
+</file>
+
+<file path=ppt/notesSlides/notesSlide12.xml><?xml version="1.0" encoding="utf-8"?>
+<p:notes xmlns:a="http://schemas.openxmlformats.org/drawingml/2006/main" xmlns:r="http://schemas.openxmlformats.org/officeDocument/2006/relationships" xmlns:p="http://schemas.openxmlformats.org/presentationml/2006/main">
+  <p:cSld>
+    <p:spTree>
+      <p:nvGrpSpPr>
+        <p:cNvPr id="1" name=""/>
+        <p:cNvGrpSpPr/>
+        <p:nvPr/>
+      </p:nvGrpSpPr>
+      <p:grpSpPr>
+        <a:xfrm>
+          <a:off x="0" y="0"/>
+          <a:ext cx="0" cy="0"/>
+          <a:chOff x="0" y="0"/>
+          <a:chExt cx="0" cy="0"/>
+        </a:xfrm>
+      </p:grpSpPr>
+      <p:sp>
+        <p:nvSpPr>
+          <p:cNvPr id="2" name="Slide Image Placeholder 1"/>
+          <p:cNvSpPr>
+            <a:spLocks noGrp="1" noRot="1" noChangeAspect="1"/>
+          </p:cNvSpPr>
+          <p:nvPr>
+            <p:ph type="sldImg"/>
+          </p:nvPr>
+        </p:nvSpPr>
+        <p:spPr/>
+      </p:sp>
+      <p:sp>
+        <p:nvSpPr>
+          <p:cNvPr id="3" name="Notes Placeholder 2"/>
+          <p:cNvSpPr>
+            <a:spLocks noGrp="1"/>
+          </p:cNvSpPr>
+          <p:nvPr>
+            <p:ph type="body" idx="1"/>
+          </p:nvPr>
+        </p:nvSpPr>
+        <p:spPr/>
+        <p:txBody>
+          <a:bodyPr/>
+          <a:lstStyle/>
+          <a:p>
+            <a:r>
+              <a:rPr lang="en-US" dirty="0"/>
+              <a:t/>
+            </a:r>
+            <a:endParaRPr lang="en-US" dirty="0"/>
+          </a:p>
+        </p:txBody>
+      </p:sp>
+      <p:sp>
+        <p:nvSpPr>
+          <p:cNvPr id="4" name="Slide Number Placeholder 3"/>
+          <p:cNvSpPr>
+            <a:spLocks noGrp="1"/>
+          </p:cNvSpPr>
+          <p:nvPr>
+            <p:ph type="sldNum" sz="quarter" idx="10"/>
+          </p:nvPr>
+        </p:nvSpPr>
+        <p:spPr/>
+        <p:txBody>
+          <a:bodyPr/>
+          <a:lstStyle/>
+          <a:p>
+            <a:fld id="{F7021451-1387-4CA6-816F-3879F97B5CBC}" type="slidenum">
+              <a:rPr lang="en-US"/>
+              <a:t>12</a:t>
+            </a:fld>
+            <a:endParaRPr lang="en-US"/>
+          </a:p>
+        </p:txBody>
+      </p:sp>
+    </p:spTree>
+    <p:extLst>
+      <p:ext uri="{BB962C8B-B14F-4D97-AF65-F5344CB8AC3E}">
+        <p14:creationId xmlns:p14="http://schemas.microsoft.com/office/powerpoint/2010/main" val="1024086991"/>
+      </p:ext>
+    </p:extLst>
+  </p:cSld>
+  <p:clrMapOvr>
+    <a:masterClrMapping/>
+  </p:clrMapOvr>
+</p:notes>
+</file>
+
+<file path=ppt/notesSlides/notesSlide13.xml><?xml version="1.0" encoding="utf-8"?>
+<p:notes xmlns:a="http://schemas.openxmlformats.org/drawingml/2006/main" xmlns:r="http://schemas.openxmlformats.org/officeDocument/2006/relationships" xmlns:p="http://schemas.openxmlformats.org/presentationml/2006/main">
+  <p:cSld>
+    <p:spTree>
+      <p:nvGrpSpPr>
+        <p:cNvPr id="1" name=""/>
+        <p:cNvGrpSpPr/>
+        <p:nvPr/>
+      </p:nvGrpSpPr>
+      <p:grpSpPr>
+        <a:xfrm>
+          <a:off x="0" y="0"/>
+          <a:ext cx="0" cy="0"/>
+          <a:chOff x="0" y="0"/>
+          <a:chExt cx="0" cy="0"/>
+        </a:xfrm>
+      </p:grpSpPr>
+      <p:sp>
+        <p:nvSpPr>
+          <p:cNvPr id="2" name="Slide Image Placeholder 1"/>
+          <p:cNvSpPr>
+            <a:spLocks noGrp="1" noRot="1" noChangeAspect="1"/>
+          </p:cNvSpPr>
+          <p:nvPr>
+            <p:ph type="sldImg"/>
+          </p:nvPr>
+        </p:nvSpPr>
+        <p:spPr/>
+      </p:sp>
+      <p:sp>
+        <p:nvSpPr>
+          <p:cNvPr id="3" name="Notes Placeholder 2"/>
+          <p:cNvSpPr>
+            <a:spLocks noGrp="1"/>
+          </p:cNvSpPr>
+          <p:nvPr>
+            <p:ph type="body" idx="1"/>
+          </p:nvPr>
+        </p:nvSpPr>
+        <p:spPr/>
+        <p:txBody>
+          <a:bodyPr/>
+          <a:lstStyle/>
+          <a:p>
+            <a:r>
+              <a:rPr lang="en-US" dirty="0"/>
+              <a:t/>
+            </a:r>
+            <a:endParaRPr lang="en-US" dirty="0"/>
+          </a:p>
+        </p:txBody>
+      </p:sp>
+      <p:sp>
+        <p:nvSpPr>
+          <p:cNvPr id="4" name="Slide Number Placeholder 3"/>
+          <p:cNvSpPr>
+            <a:spLocks noGrp="1"/>
+          </p:cNvSpPr>
+          <p:nvPr>
+            <p:ph type="sldNum" sz="quarter" idx="10"/>
+          </p:nvPr>
+        </p:nvSpPr>
+        <p:spPr/>
+        <p:txBody>
+          <a:bodyPr/>
+          <a:lstStyle/>
+          <a:p>
+            <a:fld id="{F7021451-1387-4CA6-816F-3879F97B5CBC}" type="slidenum">
+              <a:rPr lang="en-US"/>
+              <a:t>13</a:t>
+            </a:fld>
+            <a:endParaRPr lang="en-US"/>
+          </a:p>
+        </p:txBody>
+      </p:sp>
+    </p:spTree>
+    <p:extLst>
+      <p:ext uri="{BB962C8B-B14F-4D97-AF65-F5344CB8AC3E}">
+        <p14:creationId xmlns:p14="http://schemas.microsoft.com/office/powerpoint/2010/main" val="1024086991"/>
+      </p:ext>
+    </p:extLst>
+  </p:cSld>
+  <p:clrMapOvr>
+    <a:masterClrMapping/>
+  </p:clrMapOvr>
+</p:notes>
+</file>
+
+<file path=ppt/notesSlides/notesSlide14.xml><?xml version="1.0" encoding="utf-8"?>
+<p:notes xmlns:a="http://schemas.openxmlformats.org/drawingml/2006/main" xmlns:r="http://schemas.openxmlformats.org/officeDocument/2006/relationships" xmlns:p="http://schemas.openxmlformats.org/presentationml/2006/main">
+  <p:cSld>
+    <p:spTree>
+      <p:nvGrpSpPr>
+        <p:cNvPr id="1" name=""/>
+        <p:cNvGrpSpPr/>
+        <p:nvPr/>
+      </p:nvGrpSpPr>
+      <p:grpSpPr>
+        <a:xfrm>
+          <a:off x="0" y="0"/>
+          <a:ext cx="0" cy="0"/>
+          <a:chOff x="0" y="0"/>
+          <a:chExt cx="0" cy="0"/>
+        </a:xfrm>
+      </p:grpSpPr>
+      <p:sp>
+        <p:nvSpPr>
+          <p:cNvPr id="2" name="Slide Image Placeholder 1"/>
+          <p:cNvSpPr>
+            <a:spLocks noGrp="1" noRot="1" noChangeAspect="1"/>
+          </p:cNvSpPr>
+          <p:nvPr>
+            <p:ph type="sldImg"/>
+          </p:nvPr>
+        </p:nvSpPr>
+        <p:spPr/>
+      </p:sp>
+      <p:sp>
+        <p:nvSpPr>
+          <p:cNvPr id="3" name="Notes Placeholder 2"/>
+          <p:cNvSpPr>
+            <a:spLocks noGrp="1"/>
+          </p:cNvSpPr>
+          <p:nvPr>
+            <p:ph type="body" idx="1"/>
+          </p:nvPr>
+        </p:nvSpPr>
+        <p:spPr/>
+        <p:txBody>
+          <a:bodyPr/>
+          <a:lstStyle/>
+          <a:p>
+            <a:r>
+              <a:rPr lang="en-US" dirty="0"/>
+              <a:t/>
+            </a:r>
+            <a:endParaRPr lang="en-US" dirty="0"/>
+          </a:p>
+        </p:txBody>
+      </p:sp>
+      <p:sp>
+        <p:nvSpPr>
+          <p:cNvPr id="4" name="Slide Number Placeholder 3"/>
+          <p:cNvSpPr>
+            <a:spLocks noGrp="1"/>
+          </p:cNvSpPr>
+          <p:nvPr>
+            <p:ph type="sldNum" sz="quarter" idx="10"/>
+          </p:nvPr>
+        </p:nvSpPr>
+        <p:spPr/>
+        <p:txBody>
+          <a:bodyPr/>
+          <a:lstStyle/>
+          <a:p>
+            <a:fld id="{F7021451-1387-4CA6-816F-3879F97B5CBC}" type="slidenum">
+              <a:rPr lang="en-US"/>
+              <a:t>14</a:t>
+            </a:fld>
+            <a:endParaRPr lang="en-US"/>
+          </a:p>
+        </p:txBody>
+      </p:sp>
+    </p:spTree>
+    <p:extLst>
+      <p:ext uri="{BB962C8B-B14F-4D97-AF65-F5344CB8AC3E}">
+        <p14:creationId xmlns:p14="http://schemas.microsoft.com/office/powerpoint/2010/main" val="1024086991"/>
+      </p:ext>
+    </p:extLst>
+  </p:cSld>
+  <p:clrMapOvr>
+    <a:masterClrMapping/>
+  </p:clrMapOvr>
+</p:notes>
+</file>
+
+<file path=ppt/notesSlides/notesSlide15.xml><?xml version="1.0" encoding="utf-8"?>
+<p:notes xmlns:a="http://schemas.openxmlformats.org/drawingml/2006/main" xmlns:r="http://schemas.openxmlformats.org/officeDocument/2006/relationships" xmlns:p="http://schemas.openxmlformats.org/presentationml/2006/main">
+  <p:cSld>
+    <p:spTree>
+      <p:nvGrpSpPr>
+        <p:cNvPr id="1" name=""/>
+        <p:cNvGrpSpPr/>
+        <p:nvPr/>
+      </p:nvGrpSpPr>
+      <p:grpSpPr>
+        <a:xfrm>
+          <a:off x="0" y="0"/>
+          <a:ext cx="0" cy="0"/>
+          <a:chOff x="0" y="0"/>
+          <a:chExt cx="0" cy="0"/>
+        </a:xfrm>
+      </p:grpSpPr>
+      <p:sp>
+        <p:nvSpPr>
+          <p:cNvPr id="2" name="Slide Image Placeholder 1"/>
+          <p:cNvSpPr>
+            <a:spLocks noGrp="1" noRot="1" noChangeAspect="1"/>
+          </p:cNvSpPr>
+          <p:nvPr>
+            <p:ph type="sldImg"/>
+          </p:nvPr>
+        </p:nvSpPr>
+        <p:spPr/>
+      </p:sp>
+      <p:sp>
+        <p:nvSpPr>
+          <p:cNvPr id="3" name="Notes Placeholder 2"/>
+          <p:cNvSpPr>
+            <a:spLocks noGrp="1"/>
+          </p:cNvSpPr>
+          <p:nvPr>
+            <p:ph type="body" idx="1"/>
+          </p:nvPr>
+        </p:nvSpPr>
+        <p:spPr/>
+        <p:txBody>
+          <a:bodyPr/>
+          <a:lstStyle/>
+          <a:p>
+            <a:r>
+              <a:rPr lang="en-US" dirty="0"/>
+              <a:t/>
+            </a:r>
+            <a:endParaRPr lang="en-US" dirty="0"/>
+          </a:p>
+        </p:txBody>
+      </p:sp>
+      <p:sp>
+        <p:nvSpPr>
+          <p:cNvPr id="4" name="Slide Number Placeholder 3"/>
+          <p:cNvSpPr>
+            <a:spLocks noGrp="1"/>
+          </p:cNvSpPr>
+          <p:nvPr>
+            <p:ph type="sldNum" sz="quarter" idx="10"/>
+          </p:nvPr>
+        </p:nvSpPr>
+        <p:spPr/>
+        <p:txBody>
+          <a:bodyPr/>
+          <a:lstStyle/>
+          <a:p>
+            <a:fld id="{F7021451-1387-4CA6-816F-3879F97B5CBC}" type="slidenum">
+              <a:rPr lang="en-US"/>
+              <a:t>15</a:t>
             </a:fld>
             <a:endParaRPr lang="en-US"/>
           </a:p>
@@ -1965,102 +2321,6 @@
         </p:nvSpPr>
         <p:spPr>
           <a:xfrm>
-            <a:off x="406301" y="1223963"/>
-            <a:ext cx="8498026" cy="274290"/>
-          </a:xfrm>
-          <a:prstGeom prst="rect">
-            <a:avLst/>
-          </a:prstGeom>
-          <a:noFill/>
-          <a:ln/>
-        </p:spPr>
-        <p:txBody>
-          <a:bodyPr wrap="square" lIns="0" tIns="0" rIns="0" bIns="0" rtlCol="0" anchor="t"/>
-          <a:lstStyle/>
-          <a:p>
-            <a:pPr algn="l" indent="0" marL="0">
-              <a:lnSpc>
-                <a:spcPts val="2160"/>
-              </a:lnSpc>
-              <a:spcBef>
-                <a:spcPts val="600"/>
-              </a:spcBef>
-              <a:spcAft>
-                <a:spcPts val="800"/>
-              </a:spcAft>
-              <a:buNone/>
-            </a:pPr>
-            <a:r>
-              <a:rPr lang="en-US" sz="1800" b="1" dirty="0">
-                <a:solidFill>
-                  <a:srgbClr val="E07A5F"/>
-                </a:solidFill>
-                <a:latin typeface="Georgia" pitchFamily="34" charset="0"/>
-                <a:ea typeface="Georgia" pitchFamily="34" charset="-122"/>
-                <a:cs typeface="Georgia" pitchFamily="34" charset="-120"/>
-              </a:rPr>
-              <a:t>Goal</a:t>
-            </a:r>
-            <a:endParaRPr lang="en-US" sz="1800" dirty="0"/>
-          </a:p>
-        </p:txBody>
-      </p:sp>
-      <p:sp>
-        <p:nvSpPr>
-          <p:cNvPr id="6" name="Text 4"/>
-          <p:cNvSpPr/>
-          <p:nvPr/>
-        </p:nvSpPr>
-        <p:spPr>
-          <a:xfrm>
-            <a:off x="406301" y="1637854"/>
-            <a:ext cx="8498026" cy="426541"/>
-          </a:xfrm>
-          <a:prstGeom prst="rect">
-            <a:avLst/>
-          </a:prstGeom>
-          <a:noFill/>
-          <a:ln/>
-        </p:spPr>
-        <p:txBody>
-          <a:bodyPr wrap="square" lIns="0" tIns="0" rIns="0" bIns="0" rtlCol="0" anchor="t"/>
-          <a:lstStyle/>
-          <a:p>
-            <a:pPr algn="l" indent="0" marL="0">
-              <a:lnSpc>
-                <a:spcPts val="1680"/>
-              </a:lnSpc>
-              <a:spcBef>
-                <a:spcPts val="300"/>
-              </a:spcBef>
-              <a:spcAft>
-                <a:spcPts val="300"/>
-              </a:spcAft>
-              <a:buNone/>
-            </a:pPr>
-            <a:r>
-              <a:rPr lang="en-US" sz="1200" dirty="0">
-                <a:solidFill>
-                  <a:srgbClr val="2C2C2C"/>
-                </a:solidFill>
-                <a:latin typeface="Verdana" pitchFamily="34" charset="0"/>
-                <a:ea typeface="Verdana" pitchFamily="34" charset="-122"/>
-                <a:cs typeface="Verdana" pitchFamily="34" charset="-120"/>
-              </a:rPr>
-              <a:t>Children meet "friends to ten" through a chant, a story, and a card game. By end of class they can name at least three friend-pairs.</a:t>
-            </a:r>
-            <a:endParaRPr lang="en-US" sz="1200" dirty="0"/>
-          </a:p>
-        </p:txBody>
-      </p:sp>
-      <p:sp>
-        <p:nvSpPr>
-          <p:cNvPr id="7" name="Text 5"/>
-          <p:cNvSpPr/>
-          <p:nvPr/>
-        </p:nvSpPr>
-        <p:spPr>
-          <a:xfrm>
             <a:off x="406301" y="4434929"/>
             <a:ext cx="8498026" cy="213271"/>
           </a:xfrm>
@@ -2205,7 +2465,7 @@
                 <a:ea typeface="Georgia" pitchFamily="34" charset="-122"/>
                 <a:cs typeface="Georgia" pitchFamily="34" charset="-120"/>
               </a:rPr>
-              <a:t>Teacher's quick notes</a:t>
+              <a:t>Card game: Make Ten (20 min) (cont.)</a:t>
             </a:r>
             <a:endParaRPr lang="en-US" sz="1800" dirty="0"/>
           </a:p>
@@ -2220,7 +2480,7 @@
         <p:spPr>
           <a:xfrm>
             <a:off x="406301" y="870942"/>
-            <a:ext cx="8498026" cy="853083"/>
+            <a:ext cx="8498026" cy="213271"/>
           </a:xfrm>
           <a:prstGeom prst="rect">
             <a:avLst/>
@@ -2253,53 +2513,7 @@
                 <a:ea typeface="Verdana" pitchFamily="34" charset="-122"/>
                 <a:cs typeface="Verdana" pitchFamily="34" charset="-120"/>
               </a:rPr>
-              <a:t>– Some children won't find pairs and will give up. Pair them with a stronger player as a "team." – Same game as Module 5 — children may come in already half-knowing it. Affirm and add the </a:t>
-            </a:r>
-            <a:pPr algn="l" indent="0" marL="0">
-              <a:lnSpc>
-                <a:spcPts val="1680"/>
-              </a:lnSpc>
-              <a:spcBef>
-                <a:spcPts val="300"/>
-              </a:spcBef>
-              <a:spcAft>
-                <a:spcPts val="300"/>
-              </a:spcAft>
-              <a:buNone/>
-            </a:pPr>
-            <a:r>
-              <a:rPr lang="en-US" sz="1200" i="1" dirty="0">
-                <a:solidFill>
-                  <a:srgbClr val="2C2C2C"/>
-                </a:solidFill>
-                <a:latin typeface="Verdana" pitchFamily="34" charset="0"/>
-                <a:ea typeface="Verdana" pitchFamily="34" charset="-122"/>
-                <a:cs typeface="Verdana" pitchFamily="34" charset="-120"/>
-              </a:rPr>
-              <a:t>friend</a:t>
-            </a:r>
-            <a:pPr algn="l" indent="0" marL="0">
-              <a:lnSpc>
-                <a:spcPts val="1680"/>
-              </a:lnSpc>
-              <a:spcBef>
-                <a:spcPts val="300"/>
-              </a:spcBef>
-              <a:spcAft>
-                <a:spcPts val="300"/>
-              </a:spcAft>
-              <a:buNone/>
-            </a:pPr>
-            <a:r>
-              <a:rPr lang="en-US" sz="1200" dirty="0">
-                <a:solidFill>
-                  <a:srgbClr val="2C2C2C"/>
-                </a:solidFill>
-                <a:latin typeface="Verdana" pitchFamily="34" charset="0"/>
-                <a:ea typeface="Verdana" pitchFamily="34" charset="-122"/>
-                <a:cs typeface="Verdana" pitchFamily="34" charset="-120"/>
-              </a:rPr>
-              <a:t> framing. – The "friend" language is the bridge to subtraction. By Day 4 we'll say "to find 100 minus 7, ask: who's 7's friend? 3. Then put a 9 in front. 93."</a:t>
+              <a:t>Play 2–3 rounds.</a:t>
             </a:r>
             <a:endParaRPr lang="en-US" sz="1200" dirty="0"/>
           </a:p>
@@ -2457,6 +2671,1042 @@
                 <a:ea typeface="Georgia" pitchFamily="34" charset="-122"/>
                 <a:cs typeface="Georgia" pitchFamily="34" charset="-120"/>
               </a:rPr>
+              <a:t>Show + chant (5 min)</a:t>
+            </a:r>
+            <a:endParaRPr lang="en-US" sz="1800" dirty="0"/>
+          </a:p>
+        </p:txBody>
+      </p:sp>
+      <p:sp>
+        <p:nvSpPr>
+          <p:cNvPr id="4" name="Text 2"/>
+          <p:cNvSpPr/>
+          <p:nvPr/>
+        </p:nvSpPr>
+        <p:spPr>
+          <a:xfrm>
+            <a:off x="634901" y="883593"/>
+            <a:ext cx="8102798" cy="769441"/>
+          </a:xfrm>
+          <a:prstGeom prst="rect">
+            <a:avLst/>
+          </a:prstGeom>
+          <a:noFill/>
+          <a:ln/>
+        </p:spPr>
+        <p:txBody>
+          <a:bodyPr wrap="square" lIns="0" tIns="0" rIns="0" bIns="0" rtlCol="0" anchor="t"/>
+          <a:lstStyle/>
+          <a:p>
+            <a:pPr algn="l" marL="342900" indent="-342900">
+              <a:lnSpc>
+                <a:spcPts val="1620"/>
+              </a:lnSpc>
+              <a:spcAft>
+                <a:spcPts val="300"/>
+              </a:spcAft>
+              <a:buSzPct val="100000"/>
+              <a:buChar char="•"/>
+            </a:pPr>
+            <a:r>
+              <a:rPr lang="en-US" sz="1200" dirty="0">
+                <a:solidFill>
+                  <a:srgbClr val="2C2C2C"/>
+                </a:solidFill>
+                <a:latin typeface="Verdana" pitchFamily="34" charset="0"/>
+                <a:ea typeface="Verdana" pitchFamily="34" charset="-122"/>
+                <a:cs typeface="Verdana" pitchFamily="34" charset="-120"/>
+              </a:rPr>
+              <a:t>"Who won a round?" — winner shares ONE friend pair they made.</a:t>
+            </a:r>
+            <a:endParaRPr lang="en-US" sz="1200" dirty="0"/>
+          </a:p>
+          <a:p>
+            <a:pPr algn="l" marL="342900" indent="-342900">
+              <a:lnSpc>
+                <a:spcPts val="1620"/>
+              </a:lnSpc>
+              <a:spcAft>
+                <a:spcPts val="300"/>
+              </a:spcAft>
+              <a:buSzPct val="100000"/>
+              <a:buChar char="•"/>
+            </a:pPr>
+            <a:r>
+              <a:rPr lang="en-US" sz="1200" dirty="0">
+                <a:solidFill>
+                  <a:srgbClr val="2C2C2C"/>
+                </a:solidFill>
+                <a:latin typeface="Verdana" pitchFamily="34" charset="0"/>
+                <a:ea typeface="Verdana" pitchFamily="34" charset="-122"/>
+                <a:cs typeface="Verdana" pitchFamily="34" charset="-120"/>
+              </a:rPr>
+              <a:t>Class chants the pair: </a:t>
+            </a:r>
+            <a:pPr algn="l" indent="0" marL="0">
+              <a:lnSpc>
+                <a:spcPts val="1620"/>
+              </a:lnSpc>
+              <a:spcAft>
+                <a:spcPts val="300"/>
+              </a:spcAft>
+              <a:buNone/>
+            </a:pPr>
+            <a:r>
+              <a:rPr lang="en-US" sz="1200" i="1" dirty="0">
+                <a:solidFill>
+                  <a:srgbClr val="2C2C2C"/>
+                </a:solidFill>
+                <a:latin typeface="Verdana" pitchFamily="34" charset="0"/>
+                <a:ea typeface="Verdana" pitchFamily="34" charset="-122"/>
+                <a:cs typeface="Verdana" pitchFamily="34" charset="-120"/>
+              </a:rPr>
+              <a:t>"6 and 4 are friends!"</a:t>
+            </a:r>
+            <a:endParaRPr lang="en-US" sz="1200" dirty="0"/>
+          </a:p>
+          <a:p>
+            <a:pPr algn="l" marL="342900" indent="-342900">
+              <a:lnSpc>
+                <a:spcPts val="1620"/>
+              </a:lnSpc>
+              <a:spcAft>
+                <a:spcPts val="300"/>
+              </a:spcAft>
+              <a:buSzPct val="100000"/>
+              <a:buChar char="•"/>
+            </a:pPr>
+            <a:r>
+              <a:rPr lang="en-US" sz="1200" dirty="0">
+                <a:solidFill>
+                  <a:srgbClr val="2C2C2C"/>
+                </a:solidFill>
+                <a:latin typeface="Verdana" pitchFamily="34" charset="0"/>
+                <a:ea typeface="Verdana" pitchFamily="34" charset="-122"/>
+                <a:cs typeface="Verdana" pitchFamily="34" charset="-120"/>
+              </a:rPr>
+              <a:t>Close with the daily chant.</a:t>
+            </a:r>
+            <a:endParaRPr lang="en-US" sz="1200" dirty="0"/>
+          </a:p>
+        </p:txBody>
+      </p:sp>
+      <p:sp>
+        <p:nvSpPr>
+          <p:cNvPr id="5" name="Text 3"/>
+          <p:cNvSpPr/>
+          <p:nvPr/>
+        </p:nvSpPr>
+        <p:spPr>
+          <a:xfrm>
+            <a:off x="406301" y="4434929"/>
+            <a:ext cx="8498026" cy="213271"/>
+          </a:xfrm>
+          <a:prstGeom prst="rect">
+            <a:avLst/>
+          </a:prstGeom>
+          <a:noFill/>
+          <a:ln/>
+        </p:spPr>
+        <p:txBody>
+          <a:bodyPr wrap="square" lIns="0" tIns="0" rIns="0" bIns="0" rtlCol="0" anchor="t"/>
+          <a:lstStyle/>
+          <a:p>
+            <a:pPr algn="l" indent="0" marL="0">
+              <a:lnSpc>
+                <a:spcPts val="1680"/>
+              </a:lnSpc>
+              <a:spcBef>
+                <a:spcPts val="300"/>
+              </a:spcBef>
+              <a:spcAft>
+                <a:spcPts val="300"/>
+              </a:spcAft>
+              <a:buNone/>
+            </a:pPr>
+            <a:r>
+              <a:rPr lang="en-US" sz="1200" dirty="0">
+                <a:solidFill>
+                  <a:srgbClr val="2C2C2C"/>
+                </a:solidFill>
+                <a:latin typeface="Verdana" pitchFamily="34" charset="0"/>
+                <a:ea typeface="Verdana" pitchFamily="34" charset="-122"/>
+                <a:cs typeface="Verdana" pitchFamily="34" charset="-120"/>
+              </a:rPr>
+              <a:t>Primary ·  · IKS Curriculum</a:t>
+            </a:r>
+            <a:endParaRPr lang="en-US" sz="1200" dirty="0"/>
+          </a:p>
+        </p:txBody>
+      </p:sp>
+    </p:spTree>
+  </p:cSld>
+  <p:clrMapOvr>
+    <a:masterClrMapping/>
+  </p:clrMapOvr>
+</p:sld>
+</file>
+
+<file path=ppt/slides/slide12.xml><?xml version="1.0" encoding="utf-8"?>
+<p:sld xmlns:a="http://schemas.openxmlformats.org/drawingml/2006/main" xmlns:r="http://schemas.openxmlformats.org/officeDocument/2006/relationships" xmlns:p="http://schemas.openxmlformats.org/presentationml/2006/main">
+  <p:cSld name="Slide 12">
+    <p:bg>
+      <p:bgPr>
+        <a:solidFill>
+          <a:srgbClr val="FAF7F2"/>
+        </a:solidFill>
+      </p:bgPr>
+    </p:bg>
+    <p:spTree>
+      <p:nvGrpSpPr>
+        <p:cNvPr id="1" name=""/>
+        <p:cNvGrpSpPr/>
+        <p:nvPr/>
+      </p:nvGrpSpPr>
+      <p:grpSpPr>
+        <a:xfrm>
+          <a:off x="0" y="0"/>
+          <a:ext cx="0" cy="0"/>
+          <a:chOff x="0" y="0"/>
+          <a:chExt cx="0" cy="0"/>
+        </a:xfrm>
+      </p:grpSpPr>
+      <p:sp>
+        <p:nvSpPr>
+          <p:cNvPr id="2" name="Text 0"/>
+          <p:cNvSpPr/>
+          <p:nvPr/>
+        </p:nvSpPr>
+        <p:spPr>
+          <a:xfrm>
+            <a:off x="0" y="0"/>
+            <a:ext cx="9144000" cy="101501"/>
+          </a:xfrm>
+          <a:prstGeom prst="rect">
+            <a:avLst/>
+          </a:prstGeom>
+          <a:solidFill>
+            <a:srgbClr val="87A96B"/>
+          </a:solidFill>
+          <a:ln/>
+        </p:spPr>
+        <p:txBody>
+          <a:bodyPr wrap="square" rtlCol="0" anchor="ctr"/>
+          <a:lstStyle/>
+          <a:p>
+            <a:pPr indent="0" marL="0">
+              <a:buNone/>
+            </a:pPr>
+            <a:endParaRPr lang="en-US" dirty="0"/>
+          </a:p>
+        </p:txBody>
+      </p:sp>
+      <p:sp>
+        <p:nvSpPr>
+          <p:cNvPr id="3" name="Text 1"/>
+          <p:cNvSpPr/>
+          <p:nvPr/>
+        </p:nvSpPr>
+        <p:spPr>
+          <a:xfrm>
+            <a:off x="406301" y="457051"/>
+            <a:ext cx="8498026" cy="274290"/>
+          </a:xfrm>
+          <a:prstGeom prst="rect">
+            <a:avLst/>
+          </a:prstGeom>
+          <a:noFill/>
+          <a:ln/>
+        </p:spPr>
+        <p:txBody>
+          <a:bodyPr wrap="square" lIns="0" tIns="0" rIns="0" bIns="0" rtlCol="0" anchor="t"/>
+          <a:lstStyle/>
+          <a:p>
+            <a:pPr algn="l" indent="0" marL="0">
+              <a:lnSpc>
+                <a:spcPts val="2160"/>
+              </a:lnSpc>
+              <a:spcBef>
+                <a:spcPts val="600"/>
+              </a:spcBef>
+              <a:spcAft>
+                <a:spcPts val="800"/>
+              </a:spcAft>
+              <a:buNone/>
+            </a:pPr>
+            <a:r>
+              <a:rPr lang="en-US" sz="1800" b="1" dirty="0">
+                <a:solidFill>
+                  <a:srgbClr val="E07A5F"/>
+                </a:solidFill>
+                <a:latin typeface="Georgia" pitchFamily="34" charset="0"/>
+                <a:ea typeface="Georgia" pitchFamily="34" charset="-122"/>
+                <a:cs typeface="Georgia" pitchFamily="34" charset="-120"/>
+              </a:rPr>
+              <a:t>Homework / take-home</a:t>
+            </a:r>
+            <a:endParaRPr lang="en-US" sz="1800" dirty="0"/>
+          </a:p>
+        </p:txBody>
+      </p:sp>
+      <p:sp>
+        <p:nvSpPr>
+          <p:cNvPr id="4" name="Text 2"/>
+          <p:cNvSpPr/>
+          <p:nvPr/>
+        </p:nvSpPr>
+        <p:spPr>
+          <a:xfrm>
+            <a:off x="634901" y="883593"/>
+            <a:ext cx="8102798" cy="281880"/>
+          </a:xfrm>
+          <a:prstGeom prst="rect">
+            <a:avLst/>
+          </a:prstGeom>
+          <a:noFill/>
+          <a:ln/>
+        </p:spPr>
+        <p:txBody>
+          <a:bodyPr wrap="square" lIns="0" tIns="0" rIns="0" bIns="0" rtlCol="0" anchor="t"/>
+          <a:lstStyle/>
+          <a:p>
+            <a:pPr algn="l" marL="342900" indent="-342900">
+              <a:lnSpc>
+                <a:spcPts val="1620"/>
+              </a:lnSpc>
+              <a:spcAft>
+                <a:spcPts val="300"/>
+              </a:spcAft>
+              <a:buSzPct val="100000"/>
+              <a:buChar char="•"/>
+            </a:pPr>
+            <a:r>
+              <a:rPr lang="en-US" sz="1200" dirty="0">
+                <a:solidFill>
+                  <a:srgbClr val="2C2C2C"/>
+                </a:solidFill>
+                <a:latin typeface="Verdana" pitchFamily="34" charset="0"/>
+                <a:ea typeface="Verdana" pitchFamily="34" charset="-122"/>
+                <a:cs typeface="Verdana" pitchFamily="34" charset="-120"/>
+              </a:rPr>
+              <a:t>Practise the chant with a sibling or parent. Win a round of Make Ten with family!</a:t>
+            </a:r>
+            <a:endParaRPr lang="en-US" sz="1200" dirty="0"/>
+          </a:p>
+        </p:txBody>
+      </p:sp>
+      <p:sp>
+        <p:nvSpPr>
+          <p:cNvPr id="5" name="Text 3"/>
+          <p:cNvSpPr/>
+          <p:nvPr/>
+        </p:nvSpPr>
+        <p:spPr>
+          <a:xfrm>
+            <a:off x="406301" y="4434929"/>
+            <a:ext cx="8498026" cy="213271"/>
+          </a:xfrm>
+          <a:prstGeom prst="rect">
+            <a:avLst/>
+          </a:prstGeom>
+          <a:noFill/>
+          <a:ln/>
+        </p:spPr>
+        <p:txBody>
+          <a:bodyPr wrap="square" lIns="0" tIns="0" rIns="0" bIns="0" rtlCol="0" anchor="t"/>
+          <a:lstStyle/>
+          <a:p>
+            <a:pPr algn="l" indent="0" marL="0">
+              <a:lnSpc>
+                <a:spcPts val="1680"/>
+              </a:lnSpc>
+              <a:spcBef>
+                <a:spcPts val="300"/>
+              </a:spcBef>
+              <a:spcAft>
+                <a:spcPts val="300"/>
+              </a:spcAft>
+              <a:buNone/>
+            </a:pPr>
+            <a:r>
+              <a:rPr lang="en-US" sz="1200" dirty="0">
+                <a:solidFill>
+                  <a:srgbClr val="2C2C2C"/>
+                </a:solidFill>
+                <a:latin typeface="Verdana" pitchFamily="34" charset="0"/>
+                <a:ea typeface="Verdana" pitchFamily="34" charset="-122"/>
+                <a:cs typeface="Verdana" pitchFamily="34" charset="-120"/>
+              </a:rPr>
+              <a:t>Primary ·  · IKS Curriculum</a:t>
+            </a:r>
+            <a:endParaRPr lang="en-US" sz="1200" dirty="0"/>
+          </a:p>
+        </p:txBody>
+      </p:sp>
+    </p:spTree>
+  </p:cSld>
+  <p:clrMapOvr>
+    <a:masterClrMapping/>
+  </p:clrMapOvr>
+</p:sld>
+</file>
+
+<file path=ppt/slides/slide13.xml><?xml version="1.0" encoding="utf-8"?>
+<p:sld xmlns:a="http://schemas.openxmlformats.org/drawingml/2006/main" xmlns:r="http://schemas.openxmlformats.org/officeDocument/2006/relationships" xmlns:p="http://schemas.openxmlformats.org/presentationml/2006/main">
+  <p:cSld name="Slide 13">
+    <p:bg>
+      <p:bgPr>
+        <a:solidFill>
+          <a:srgbClr val="FAF7F2"/>
+        </a:solidFill>
+      </p:bgPr>
+    </p:bg>
+    <p:spTree>
+      <p:nvGrpSpPr>
+        <p:cNvPr id="1" name=""/>
+        <p:cNvGrpSpPr/>
+        <p:nvPr/>
+      </p:nvGrpSpPr>
+      <p:grpSpPr>
+        <a:xfrm>
+          <a:off x="0" y="0"/>
+          <a:ext cx="0" cy="0"/>
+          <a:chOff x="0" y="0"/>
+          <a:chExt cx="0" cy="0"/>
+        </a:xfrm>
+      </p:grpSpPr>
+      <p:sp>
+        <p:nvSpPr>
+          <p:cNvPr id="2" name="Text 0"/>
+          <p:cNvSpPr/>
+          <p:nvPr/>
+        </p:nvSpPr>
+        <p:spPr>
+          <a:xfrm>
+            <a:off x="0" y="0"/>
+            <a:ext cx="9144000" cy="101501"/>
+          </a:xfrm>
+          <a:prstGeom prst="rect">
+            <a:avLst/>
+          </a:prstGeom>
+          <a:solidFill>
+            <a:srgbClr val="87A96B"/>
+          </a:solidFill>
+          <a:ln/>
+        </p:spPr>
+        <p:txBody>
+          <a:bodyPr wrap="square" rtlCol="0" anchor="ctr"/>
+          <a:lstStyle/>
+          <a:p>
+            <a:pPr indent="0" marL="0">
+              <a:buNone/>
+            </a:pPr>
+            <a:endParaRPr lang="en-US" dirty="0"/>
+          </a:p>
+        </p:txBody>
+      </p:sp>
+      <p:sp>
+        <p:nvSpPr>
+          <p:cNvPr id="3" name="Text 1"/>
+          <p:cNvSpPr/>
+          <p:nvPr/>
+        </p:nvSpPr>
+        <p:spPr>
+          <a:xfrm>
+            <a:off x="406301" y="457051"/>
+            <a:ext cx="8498026" cy="274290"/>
+          </a:xfrm>
+          <a:prstGeom prst="rect">
+            <a:avLst/>
+          </a:prstGeom>
+          <a:noFill/>
+          <a:ln/>
+        </p:spPr>
+        <p:txBody>
+          <a:bodyPr wrap="square" lIns="0" tIns="0" rIns="0" bIns="0" rtlCol="0" anchor="t"/>
+          <a:lstStyle/>
+          <a:p>
+            <a:pPr algn="l" indent="0" marL="0">
+              <a:lnSpc>
+                <a:spcPts val="2160"/>
+              </a:lnSpc>
+              <a:spcBef>
+                <a:spcPts val="600"/>
+              </a:spcBef>
+              <a:spcAft>
+                <a:spcPts val="800"/>
+              </a:spcAft>
+              <a:buNone/>
+            </a:pPr>
+            <a:r>
+              <a:rPr lang="en-US" sz="1800" b="1" dirty="0">
+                <a:solidFill>
+                  <a:srgbClr val="E07A5F"/>
+                </a:solidFill>
+                <a:latin typeface="Georgia" pitchFamily="34" charset="0"/>
+                <a:ea typeface="Georgia" pitchFamily="34" charset="-122"/>
+                <a:cs typeface="Georgia" pitchFamily="34" charset="-120"/>
+              </a:rPr>
+              <a:t>Differentiation</a:t>
+            </a:r>
+            <a:endParaRPr lang="en-US" sz="1800" dirty="0"/>
+          </a:p>
+        </p:txBody>
+      </p:sp>
+      <p:sp>
+        <p:nvSpPr>
+          <p:cNvPr id="4" name="Text 2"/>
+          <p:cNvSpPr/>
+          <p:nvPr/>
+        </p:nvSpPr>
+        <p:spPr>
+          <a:xfrm>
+            <a:off x="634901" y="883593"/>
+            <a:ext cx="8102798" cy="525661"/>
+          </a:xfrm>
+          <a:prstGeom prst="rect">
+            <a:avLst/>
+          </a:prstGeom>
+          <a:noFill/>
+          <a:ln/>
+        </p:spPr>
+        <p:txBody>
+          <a:bodyPr wrap="square" lIns="0" tIns="0" rIns="0" bIns="0" rtlCol="0" anchor="t"/>
+          <a:lstStyle/>
+          <a:p>
+            <a:pPr algn="l" marL="342900" indent="-342900">
+              <a:lnSpc>
+                <a:spcPts val="1620"/>
+              </a:lnSpc>
+              <a:spcAft>
+                <a:spcPts val="300"/>
+              </a:spcAft>
+              <a:buSzPct val="100000"/>
+              <a:buChar char="•"/>
+            </a:pPr>
+            <a:r>
+              <a:rPr lang="en-US" sz="1200" b="1" dirty="0">
+                <a:solidFill>
+                  <a:srgbClr val="2C2C2C"/>
+                </a:solidFill>
+                <a:latin typeface="Verdana" pitchFamily="34" charset="0"/>
+                <a:ea typeface="Verdana" pitchFamily="34" charset="-122"/>
+                <a:cs typeface="Verdana" pitchFamily="34" charset="-120"/>
+              </a:rPr>
+              <a:t>Tier up:</a:t>
+            </a:r>
+            <a:pPr algn="l" indent="0" marL="0">
+              <a:lnSpc>
+                <a:spcPts val="1620"/>
+              </a:lnSpc>
+              <a:spcAft>
+                <a:spcPts val="300"/>
+              </a:spcAft>
+              <a:buNone/>
+            </a:pPr>
+            <a:r>
+              <a:rPr lang="en-US" sz="1200" dirty="0">
+                <a:solidFill>
+                  <a:srgbClr val="2C2C2C"/>
+                </a:solidFill>
+                <a:latin typeface="Verdana" pitchFamily="34" charset="0"/>
+                <a:ea typeface="Verdana" pitchFamily="34" charset="-122"/>
+                <a:cs typeface="Verdana" pitchFamily="34" charset="-120"/>
+              </a:rPr>
+              <a:t> Use 0–9 cards including 0+10 pairs.</a:t>
+            </a:r>
+            <a:endParaRPr lang="en-US" sz="1200" dirty="0"/>
+          </a:p>
+          <a:p>
+            <a:pPr algn="l" marL="342900" indent="-342900">
+              <a:lnSpc>
+                <a:spcPts val="1620"/>
+              </a:lnSpc>
+              <a:spcAft>
+                <a:spcPts val="300"/>
+              </a:spcAft>
+              <a:buSzPct val="100000"/>
+              <a:buChar char="•"/>
+            </a:pPr>
+            <a:r>
+              <a:rPr lang="en-US" sz="1200" b="1" dirty="0">
+                <a:solidFill>
+                  <a:srgbClr val="2C2C2C"/>
+                </a:solidFill>
+                <a:latin typeface="Verdana" pitchFamily="34" charset="0"/>
+                <a:ea typeface="Verdana" pitchFamily="34" charset="-122"/>
+                <a:cs typeface="Verdana" pitchFamily="34" charset="-120"/>
+              </a:rPr>
+              <a:t>Tier down:</a:t>
+            </a:r>
+            <a:pPr algn="l" indent="0" marL="0">
+              <a:lnSpc>
+                <a:spcPts val="1620"/>
+              </a:lnSpc>
+              <a:spcAft>
+                <a:spcPts val="300"/>
+              </a:spcAft>
+              <a:buNone/>
+            </a:pPr>
+            <a:r>
+              <a:rPr lang="en-US" sz="1200" dirty="0">
+                <a:solidFill>
+                  <a:srgbClr val="2C2C2C"/>
+                </a:solidFill>
+                <a:latin typeface="Verdana" pitchFamily="34" charset="0"/>
+                <a:ea typeface="Verdana" pitchFamily="34" charset="-122"/>
+                <a:cs typeface="Verdana" pitchFamily="34" charset="-120"/>
+              </a:rPr>
+              <a:t> Use cards 1–6 to keep pairs simple.</a:t>
+            </a:r>
+            <a:endParaRPr lang="en-US" sz="1200" dirty="0"/>
+          </a:p>
+        </p:txBody>
+      </p:sp>
+      <p:sp>
+        <p:nvSpPr>
+          <p:cNvPr id="5" name="Text 3"/>
+          <p:cNvSpPr/>
+          <p:nvPr/>
+        </p:nvSpPr>
+        <p:spPr>
+          <a:xfrm>
+            <a:off x="406301" y="4434929"/>
+            <a:ext cx="8498026" cy="213271"/>
+          </a:xfrm>
+          <a:prstGeom prst="rect">
+            <a:avLst/>
+          </a:prstGeom>
+          <a:noFill/>
+          <a:ln/>
+        </p:spPr>
+        <p:txBody>
+          <a:bodyPr wrap="square" lIns="0" tIns="0" rIns="0" bIns="0" rtlCol="0" anchor="t"/>
+          <a:lstStyle/>
+          <a:p>
+            <a:pPr algn="l" indent="0" marL="0">
+              <a:lnSpc>
+                <a:spcPts val="1680"/>
+              </a:lnSpc>
+              <a:spcBef>
+                <a:spcPts val="300"/>
+              </a:spcBef>
+              <a:spcAft>
+                <a:spcPts val="300"/>
+              </a:spcAft>
+              <a:buNone/>
+            </a:pPr>
+            <a:r>
+              <a:rPr lang="en-US" sz="1200" dirty="0">
+                <a:solidFill>
+                  <a:srgbClr val="2C2C2C"/>
+                </a:solidFill>
+                <a:latin typeface="Verdana" pitchFamily="34" charset="0"/>
+                <a:ea typeface="Verdana" pitchFamily="34" charset="-122"/>
+                <a:cs typeface="Verdana" pitchFamily="34" charset="-120"/>
+              </a:rPr>
+              <a:t>Primary ·  · IKS Curriculum</a:t>
+            </a:r>
+            <a:endParaRPr lang="en-US" sz="1200" dirty="0"/>
+          </a:p>
+        </p:txBody>
+      </p:sp>
+    </p:spTree>
+  </p:cSld>
+  <p:clrMapOvr>
+    <a:masterClrMapping/>
+  </p:clrMapOvr>
+</p:sld>
+</file>
+
+<file path=ppt/slides/slide14.xml><?xml version="1.0" encoding="utf-8"?>
+<p:sld xmlns:a="http://schemas.openxmlformats.org/drawingml/2006/main" xmlns:r="http://schemas.openxmlformats.org/officeDocument/2006/relationships" xmlns:p="http://schemas.openxmlformats.org/presentationml/2006/main">
+  <p:cSld name="Slide 14">
+    <p:bg>
+      <p:bgPr>
+        <a:solidFill>
+          <a:srgbClr val="FAF7F2"/>
+        </a:solidFill>
+      </p:bgPr>
+    </p:bg>
+    <p:spTree>
+      <p:nvGrpSpPr>
+        <p:cNvPr id="1" name=""/>
+        <p:cNvGrpSpPr/>
+        <p:nvPr/>
+      </p:nvGrpSpPr>
+      <p:grpSpPr>
+        <a:xfrm>
+          <a:off x="0" y="0"/>
+          <a:ext cx="0" cy="0"/>
+          <a:chOff x="0" y="0"/>
+          <a:chExt cx="0" cy="0"/>
+        </a:xfrm>
+      </p:grpSpPr>
+      <p:sp>
+        <p:nvSpPr>
+          <p:cNvPr id="2" name="Text 0"/>
+          <p:cNvSpPr/>
+          <p:nvPr/>
+        </p:nvSpPr>
+        <p:spPr>
+          <a:xfrm>
+            <a:off x="0" y="0"/>
+            <a:ext cx="9144000" cy="101501"/>
+          </a:xfrm>
+          <a:prstGeom prst="rect">
+            <a:avLst/>
+          </a:prstGeom>
+          <a:solidFill>
+            <a:srgbClr val="87A96B"/>
+          </a:solidFill>
+          <a:ln/>
+        </p:spPr>
+        <p:txBody>
+          <a:bodyPr wrap="square" rtlCol="0" anchor="ctr"/>
+          <a:lstStyle/>
+          <a:p>
+            <a:pPr indent="0" marL="0">
+              <a:buNone/>
+            </a:pPr>
+            <a:endParaRPr lang="en-US" dirty="0"/>
+          </a:p>
+        </p:txBody>
+      </p:sp>
+      <p:sp>
+        <p:nvSpPr>
+          <p:cNvPr id="3" name="Text 1"/>
+          <p:cNvSpPr/>
+          <p:nvPr/>
+        </p:nvSpPr>
+        <p:spPr>
+          <a:xfrm>
+            <a:off x="406301" y="457051"/>
+            <a:ext cx="8498026" cy="274290"/>
+          </a:xfrm>
+          <a:prstGeom prst="rect">
+            <a:avLst/>
+          </a:prstGeom>
+          <a:noFill/>
+          <a:ln/>
+        </p:spPr>
+        <p:txBody>
+          <a:bodyPr wrap="square" lIns="0" tIns="0" rIns="0" bIns="0" rtlCol="0" anchor="t"/>
+          <a:lstStyle/>
+          <a:p>
+            <a:pPr algn="l" indent="0" marL="0">
+              <a:lnSpc>
+                <a:spcPts val="2160"/>
+              </a:lnSpc>
+              <a:spcBef>
+                <a:spcPts val="600"/>
+              </a:spcBef>
+              <a:spcAft>
+                <a:spcPts val="800"/>
+              </a:spcAft>
+              <a:buNone/>
+            </a:pPr>
+            <a:r>
+              <a:rPr lang="en-US" sz="1800" b="1" dirty="0">
+                <a:solidFill>
+                  <a:srgbClr val="E07A5F"/>
+                </a:solidFill>
+                <a:latin typeface="Georgia" pitchFamily="34" charset="0"/>
+                <a:ea typeface="Georgia" pitchFamily="34" charset="-122"/>
+                <a:cs typeface="Georgia" pitchFamily="34" charset="-120"/>
+              </a:rPr>
+              <a:t>Teacher's quick notes</a:t>
+            </a:r>
+            <a:endParaRPr lang="en-US" sz="1800" dirty="0"/>
+          </a:p>
+        </p:txBody>
+      </p:sp>
+      <p:sp>
+        <p:nvSpPr>
+          <p:cNvPr id="4" name="Text 2"/>
+          <p:cNvSpPr/>
+          <p:nvPr/>
+        </p:nvSpPr>
+        <p:spPr>
+          <a:xfrm>
+            <a:off x="634901" y="883593"/>
+            <a:ext cx="8102798" cy="1180802"/>
+          </a:xfrm>
+          <a:prstGeom prst="rect">
+            <a:avLst/>
+          </a:prstGeom>
+          <a:noFill/>
+          <a:ln/>
+        </p:spPr>
+        <p:txBody>
+          <a:bodyPr wrap="square" lIns="0" tIns="0" rIns="0" bIns="0" rtlCol="0" anchor="t"/>
+          <a:lstStyle/>
+          <a:p>
+            <a:pPr algn="l" marL="342900" indent="-342900">
+              <a:lnSpc>
+                <a:spcPts val="1620"/>
+              </a:lnSpc>
+              <a:spcAft>
+                <a:spcPts val="300"/>
+              </a:spcAft>
+              <a:buSzPct val="100000"/>
+              <a:buChar char="•"/>
+            </a:pPr>
+            <a:r>
+              <a:rPr lang="en-US" sz="1200" dirty="0">
+                <a:solidFill>
+                  <a:srgbClr val="2C2C2C"/>
+                </a:solidFill>
+                <a:latin typeface="Verdana" pitchFamily="34" charset="0"/>
+                <a:ea typeface="Verdana" pitchFamily="34" charset="-122"/>
+                <a:cs typeface="Verdana" pitchFamily="34" charset="-120"/>
+              </a:rPr>
+              <a:t>Some children won't find pairs and will give up. Pair them with a stronger player as a "team."</a:t>
+            </a:r>
+            <a:endParaRPr lang="en-US" sz="1200" dirty="0"/>
+          </a:p>
+          <a:p>
+            <a:pPr algn="l" marL="342900" indent="-342900">
+              <a:lnSpc>
+                <a:spcPts val="1620"/>
+              </a:lnSpc>
+              <a:spcAft>
+                <a:spcPts val="300"/>
+              </a:spcAft>
+              <a:buSzPct val="100000"/>
+              <a:buChar char="•"/>
+            </a:pPr>
+            <a:r>
+              <a:rPr lang="en-US" sz="1200" dirty="0">
+                <a:solidFill>
+                  <a:srgbClr val="2C2C2C"/>
+                </a:solidFill>
+                <a:latin typeface="Verdana" pitchFamily="34" charset="0"/>
+                <a:ea typeface="Verdana" pitchFamily="34" charset="-122"/>
+                <a:cs typeface="Verdana" pitchFamily="34" charset="-120"/>
+              </a:rPr>
+              <a:t>Same game as Module 5 — children may come in already half-knowing it. Affirm and add the </a:t>
+            </a:r>
+            <a:pPr algn="l" indent="0" marL="0">
+              <a:lnSpc>
+                <a:spcPts val="1620"/>
+              </a:lnSpc>
+              <a:spcAft>
+                <a:spcPts val="300"/>
+              </a:spcAft>
+              <a:buNone/>
+            </a:pPr>
+            <a:r>
+              <a:rPr lang="en-US" sz="1200" i="1" dirty="0">
+                <a:solidFill>
+                  <a:srgbClr val="2C2C2C"/>
+                </a:solidFill>
+                <a:latin typeface="Verdana" pitchFamily="34" charset="0"/>
+                <a:ea typeface="Verdana" pitchFamily="34" charset="-122"/>
+                <a:cs typeface="Verdana" pitchFamily="34" charset="-120"/>
+              </a:rPr>
+              <a:t>friend</a:t>
+            </a:r>
+            <a:pPr algn="l" indent="0" marL="0">
+              <a:lnSpc>
+                <a:spcPts val="1620"/>
+              </a:lnSpc>
+              <a:spcAft>
+                <a:spcPts val="300"/>
+              </a:spcAft>
+              <a:buNone/>
+            </a:pPr>
+            <a:r>
+              <a:rPr lang="en-US" sz="1200" dirty="0">
+                <a:solidFill>
+                  <a:srgbClr val="2C2C2C"/>
+                </a:solidFill>
+                <a:latin typeface="Verdana" pitchFamily="34" charset="0"/>
+                <a:ea typeface="Verdana" pitchFamily="34" charset="-122"/>
+                <a:cs typeface="Verdana" pitchFamily="34" charset="-120"/>
+              </a:rPr>
+              <a:t> framing.</a:t>
+            </a:r>
+            <a:endParaRPr lang="en-US" sz="1200" dirty="0"/>
+          </a:p>
+          <a:p>
+            <a:pPr algn="l" marL="342900" indent="-342900">
+              <a:lnSpc>
+                <a:spcPts val="1620"/>
+              </a:lnSpc>
+              <a:spcAft>
+                <a:spcPts val="300"/>
+              </a:spcAft>
+              <a:buSzPct val="100000"/>
+              <a:buChar char="•"/>
+            </a:pPr>
+            <a:r>
+              <a:rPr lang="en-US" sz="1200" dirty="0">
+                <a:solidFill>
+                  <a:srgbClr val="2C2C2C"/>
+                </a:solidFill>
+                <a:latin typeface="Verdana" pitchFamily="34" charset="0"/>
+                <a:ea typeface="Verdana" pitchFamily="34" charset="-122"/>
+                <a:cs typeface="Verdana" pitchFamily="34" charset="-120"/>
+              </a:rPr>
+              <a:t>The "friend" language is the bridge to subtraction. By Day 4 we'll say "to find 100 minus 7, ask: who's 7's friend? 3. Then put a 9 in front. 93."</a:t>
+            </a:r>
+            <a:endParaRPr lang="en-US" sz="1200" dirty="0"/>
+          </a:p>
+        </p:txBody>
+      </p:sp>
+      <p:sp>
+        <p:nvSpPr>
+          <p:cNvPr id="5" name="Text 3"/>
+          <p:cNvSpPr/>
+          <p:nvPr/>
+        </p:nvSpPr>
+        <p:spPr>
+          <a:xfrm>
+            <a:off x="406301" y="4434929"/>
+            <a:ext cx="8498026" cy="213271"/>
+          </a:xfrm>
+          <a:prstGeom prst="rect">
+            <a:avLst/>
+          </a:prstGeom>
+          <a:noFill/>
+          <a:ln/>
+        </p:spPr>
+        <p:txBody>
+          <a:bodyPr wrap="square" lIns="0" tIns="0" rIns="0" bIns="0" rtlCol="0" anchor="t"/>
+          <a:lstStyle/>
+          <a:p>
+            <a:pPr algn="l" indent="0" marL="0">
+              <a:lnSpc>
+                <a:spcPts val="1680"/>
+              </a:lnSpc>
+              <a:spcBef>
+                <a:spcPts val="300"/>
+              </a:spcBef>
+              <a:spcAft>
+                <a:spcPts val="300"/>
+              </a:spcAft>
+              <a:buNone/>
+            </a:pPr>
+            <a:r>
+              <a:rPr lang="en-US" sz="1200" dirty="0">
+                <a:solidFill>
+                  <a:srgbClr val="2C2C2C"/>
+                </a:solidFill>
+                <a:latin typeface="Verdana" pitchFamily="34" charset="0"/>
+                <a:ea typeface="Verdana" pitchFamily="34" charset="-122"/>
+                <a:cs typeface="Verdana" pitchFamily="34" charset="-120"/>
+              </a:rPr>
+              <a:t>Primary ·  · IKS Curriculum</a:t>
+            </a:r>
+            <a:endParaRPr lang="en-US" sz="1200" dirty="0"/>
+          </a:p>
+        </p:txBody>
+      </p:sp>
+    </p:spTree>
+  </p:cSld>
+  <p:clrMapOvr>
+    <a:masterClrMapping/>
+  </p:clrMapOvr>
+</p:sld>
+</file>
+
+<file path=ppt/slides/slide15.xml><?xml version="1.0" encoding="utf-8"?>
+<p:sld xmlns:a="http://schemas.openxmlformats.org/drawingml/2006/main" xmlns:r="http://schemas.openxmlformats.org/officeDocument/2006/relationships" xmlns:p="http://schemas.openxmlformats.org/presentationml/2006/main">
+  <p:cSld name="Slide 15">
+    <p:bg>
+      <p:bgPr>
+        <a:solidFill>
+          <a:srgbClr val="FAF7F2"/>
+        </a:solidFill>
+      </p:bgPr>
+    </p:bg>
+    <p:spTree>
+      <p:nvGrpSpPr>
+        <p:cNvPr id="1" name=""/>
+        <p:cNvGrpSpPr/>
+        <p:nvPr/>
+      </p:nvGrpSpPr>
+      <p:grpSpPr>
+        <a:xfrm>
+          <a:off x="0" y="0"/>
+          <a:ext cx="0" cy="0"/>
+          <a:chOff x="0" y="0"/>
+          <a:chExt cx="0" cy="0"/>
+        </a:xfrm>
+      </p:grpSpPr>
+      <p:sp>
+        <p:nvSpPr>
+          <p:cNvPr id="2" name="Text 0"/>
+          <p:cNvSpPr/>
+          <p:nvPr/>
+        </p:nvSpPr>
+        <p:spPr>
+          <a:xfrm>
+            <a:off x="0" y="0"/>
+            <a:ext cx="9144000" cy="101501"/>
+          </a:xfrm>
+          <a:prstGeom prst="rect">
+            <a:avLst/>
+          </a:prstGeom>
+          <a:solidFill>
+            <a:srgbClr val="87A96B"/>
+          </a:solidFill>
+          <a:ln/>
+        </p:spPr>
+        <p:txBody>
+          <a:bodyPr wrap="square" rtlCol="0" anchor="ctr"/>
+          <a:lstStyle/>
+          <a:p>
+            <a:pPr indent="0" marL="0">
+              <a:buNone/>
+            </a:pPr>
+            <a:endParaRPr lang="en-US" dirty="0"/>
+          </a:p>
+        </p:txBody>
+      </p:sp>
+      <p:sp>
+        <p:nvSpPr>
+          <p:cNvPr id="3" name="Text 1"/>
+          <p:cNvSpPr/>
+          <p:nvPr/>
+        </p:nvSpPr>
+        <p:spPr>
+          <a:xfrm>
+            <a:off x="406301" y="457051"/>
+            <a:ext cx="8498026" cy="274290"/>
+          </a:xfrm>
+          <a:prstGeom prst="rect">
+            <a:avLst/>
+          </a:prstGeom>
+          <a:noFill/>
+          <a:ln/>
+        </p:spPr>
+        <p:txBody>
+          <a:bodyPr wrap="square" lIns="0" tIns="0" rIns="0" bIns="0" rtlCol="0" anchor="t"/>
+          <a:lstStyle/>
+          <a:p>
+            <a:pPr algn="l" indent="0" marL="0">
+              <a:lnSpc>
+                <a:spcPts val="2160"/>
+              </a:lnSpc>
+              <a:spcBef>
+                <a:spcPts val="600"/>
+              </a:spcBef>
+              <a:spcAft>
+                <a:spcPts val="800"/>
+              </a:spcAft>
+              <a:buNone/>
+            </a:pPr>
+            <a:r>
+              <a:rPr lang="en-US" sz="1800" b="1" dirty="0">
+                <a:solidFill>
+                  <a:srgbClr val="E07A5F"/>
+                </a:solidFill>
+                <a:latin typeface="Georgia" pitchFamily="34" charset="0"/>
+                <a:ea typeface="Georgia" pitchFamily="34" charset="-122"/>
+                <a:cs typeface="Georgia" pitchFamily="34" charset="-120"/>
+              </a:rPr>
               <a:t>Teacher note on Sanskrit</a:t>
             </a:r>
             <a:endParaRPr lang="en-US" sz="1800" dirty="0"/>
@@ -2709,7 +3959,7 @@
                 <a:ea typeface="Georgia" pitchFamily="34" charset="-122"/>
                 <a:cs typeface="Georgia" pitchFamily="34" charset="-120"/>
               </a:rPr>
-              <a:t>Materials</a:t>
+              <a:t>Goal</a:t>
             </a:r>
             <a:endParaRPr lang="en-US" sz="1800" dirty="0"/>
           </a:p>
@@ -2724,7 +3974,7 @@
         <p:spPr>
           <a:xfrm>
             <a:off x="406301" y="870942"/>
-            <a:ext cx="8498026" cy="213271"/>
+            <a:ext cx="8498026" cy="426541"/>
           </a:xfrm>
           <a:prstGeom prst="rect">
             <a:avLst/>
@@ -2757,7 +4007,7 @@
                 <a:ea typeface="Verdana" pitchFamily="34" charset="-122"/>
                 <a:cs typeface="Verdana" pitchFamily="34" charset="-120"/>
               </a:rPr>
-              <a:t>– A deck of number cards 0–9 (4 of each = 40 cards) per pair – Drawing paper + crayons</a:t>
+              <a:t>Children meet "friends to ten" through a chant, a story, and a card game. By end of class they can name at least three friend-pairs.</a:t>
             </a:r>
             <a:endParaRPr lang="en-US" sz="1200" dirty="0"/>
           </a:p>
@@ -2766,52 +4016,6 @@
       <p:sp>
         <p:nvSpPr>
           <p:cNvPr id="5" name="Text 3"/>
-          <p:cNvSpPr/>
-          <p:nvPr/>
-        </p:nvSpPr>
-        <p:spPr>
-          <a:xfrm>
-            <a:off x="634901" y="1173063"/>
-            <a:ext cx="8102798" cy="281880"/>
-          </a:xfrm>
-          <a:prstGeom prst="rect">
-            <a:avLst/>
-          </a:prstGeom>
-          <a:noFill/>
-          <a:ln/>
-        </p:spPr>
-        <p:txBody>
-          <a:bodyPr wrap="square" lIns="0" tIns="0" rIns="0" bIns="0" rtlCol="0" anchor="t"/>
-          <a:lstStyle/>
-          <a:p>
-            <a:pPr algn="l" marL="342900" indent="-342900">
-              <a:lnSpc>
-                <a:spcPts val="1620"/>
-              </a:lnSpc>
-              <a:spcAft>
-                <a:spcPts val="300"/>
-              </a:spcAft>
-              <a:buSzPct val="100000"/>
-              <a:buChar char="•"/>
-            </a:pPr>
-            <a:r>
-              <a:rPr lang="en-US" sz="1200" dirty="0">
-                <a:solidFill>
-                  <a:srgbClr val="2C2C2C"/>
-                </a:solidFill>
-                <a:latin typeface="Verdana" pitchFamily="34" charset="0"/>
-                <a:ea typeface="Verdana" pitchFamily="34" charset="-122"/>
-                <a:cs typeface="Verdana" pitchFamily="34" charset="-120"/>
-              </a:rPr>
-              <a:t>"Friends to Ten" wall poster (5 colourful pairs)</a:t>
-            </a:r>
-            <a:endParaRPr lang="en-US" sz="1200" dirty="0"/>
-          </a:p>
-        </p:txBody>
-      </p:sp>
-      <p:sp>
-        <p:nvSpPr>
-          <p:cNvPr id="6" name="Text 4"/>
           <p:cNvSpPr/>
           <p:nvPr/>
         </p:nvSpPr>
@@ -2961,7 +4165,7 @@
                 <a:ea typeface="Georgia" pitchFamily="34" charset="-122"/>
                 <a:cs typeface="Georgia" pitchFamily="34" charset="-120"/>
               </a:rPr>
-              <a:t>The flow</a:t>
+              <a:t>Materials</a:t>
             </a:r>
             <a:endParaRPr lang="en-US" sz="1800" dirty="0"/>
           </a:p>
@@ -2970,6 +4174,100 @@
       <p:sp>
         <p:nvSpPr>
           <p:cNvPr id="4" name="Text 2"/>
+          <p:cNvSpPr/>
+          <p:nvPr/>
+        </p:nvSpPr>
+        <p:spPr>
+          <a:xfrm>
+            <a:off x="634901" y="883593"/>
+            <a:ext cx="8102798" cy="769441"/>
+          </a:xfrm>
+          <a:prstGeom prst="rect">
+            <a:avLst/>
+          </a:prstGeom>
+          <a:noFill/>
+          <a:ln/>
+        </p:spPr>
+        <p:txBody>
+          <a:bodyPr wrap="square" lIns="0" tIns="0" rIns="0" bIns="0" rtlCol="0" anchor="t"/>
+          <a:lstStyle/>
+          <a:p>
+            <a:pPr algn="l" marL="342900" indent="-342900">
+              <a:lnSpc>
+                <a:spcPts val="1620"/>
+              </a:lnSpc>
+              <a:spcAft>
+                <a:spcPts val="300"/>
+              </a:spcAft>
+              <a:buSzPct val="100000"/>
+              <a:buChar char="•"/>
+            </a:pPr>
+            <a:r>
+              <a:rPr lang="en-US" sz="1200" dirty="0">
+                <a:solidFill>
+                  <a:srgbClr val="2C2C2C"/>
+                </a:solidFill>
+                <a:latin typeface="Verdana" pitchFamily="34" charset="0"/>
+                <a:ea typeface="Verdana" pitchFamily="34" charset="-122"/>
+                <a:cs typeface="Verdana" pitchFamily="34" charset="-120"/>
+              </a:rPr>
+              <a:t>A deck of number cards 0–9 (4 of each = 40 cards) per pair</a:t>
+            </a:r>
+            <a:endParaRPr lang="en-US" sz="1200" dirty="0"/>
+          </a:p>
+          <a:p>
+            <a:pPr algn="l" marL="342900" indent="-342900">
+              <a:lnSpc>
+                <a:spcPts val="1620"/>
+              </a:lnSpc>
+              <a:spcAft>
+                <a:spcPts val="300"/>
+              </a:spcAft>
+              <a:buSzPct val="100000"/>
+              <a:buChar char="•"/>
+            </a:pPr>
+            <a:r>
+              <a:rPr lang="en-US" sz="1200" dirty="0">
+                <a:solidFill>
+                  <a:srgbClr val="2C2C2C"/>
+                </a:solidFill>
+                <a:latin typeface="Verdana" pitchFamily="34" charset="0"/>
+                <a:ea typeface="Verdana" pitchFamily="34" charset="-122"/>
+                <a:cs typeface="Verdana" pitchFamily="34" charset="-120"/>
+              </a:rPr>
+              <a:t>Drawing paper + crayons</a:t>
+            </a:r>
+            <a:endParaRPr lang="en-US" sz="1200" dirty="0"/>
+          </a:p>
+          <a:p>
+            <a:pPr algn="l" marL="342900" indent="-342900">
+              <a:lnSpc>
+                <a:spcPts val="1620"/>
+              </a:lnSpc>
+              <a:spcAft>
+                <a:spcPts val="300"/>
+              </a:spcAft>
+              <a:buSzPct val="100000"/>
+              <a:buChar char="•"/>
+            </a:pPr>
+            <a:r>
+              <a:rPr lang="en-US" sz="1200" dirty="0">
+                <a:solidFill>
+                  <a:srgbClr val="2C2C2C"/>
+                </a:solidFill>
+                <a:latin typeface="Verdana" pitchFamily="34" charset="0"/>
+                <a:ea typeface="Verdana" pitchFamily="34" charset="-122"/>
+                <a:cs typeface="Verdana" pitchFamily="34" charset="-120"/>
+              </a:rPr>
+              <a:t>"Friends to Ten" wall poster (5 colourful pairs)</a:t>
+            </a:r>
+            <a:endParaRPr lang="en-US" sz="1200" dirty="0"/>
+          </a:p>
+        </p:txBody>
+      </p:sp>
+      <p:sp>
+        <p:nvSpPr>
+          <p:cNvPr id="5" name="Text 3"/>
           <p:cNvSpPr/>
           <p:nvPr/>
         </p:nvSpPr>
@@ -3119,7 +4417,7 @@
                 <a:ea typeface="Georgia" pitchFamily="34" charset="-122"/>
                 <a:cs typeface="Georgia" pitchFamily="34" charset="-120"/>
               </a:rPr>
-              <a:t>Settle + chant (5 min)</a:t>
+              <a:t>The flow</a:t>
             </a:r>
             <a:endParaRPr lang="en-US" sz="1800" dirty="0"/>
           </a:p>
@@ -3128,304 +4426,6 @@
       <p:sp>
         <p:nvSpPr>
           <p:cNvPr id="4" name="Text 2"/>
-          <p:cNvSpPr/>
-          <p:nvPr/>
-        </p:nvSpPr>
-        <p:spPr>
-          <a:xfrm>
-            <a:off x="406301" y="870942"/>
-            <a:ext cx="8498026" cy="213271"/>
-          </a:xfrm>
-          <a:prstGeom prst="rect">
-            <a:avLst/>
-          </a:prstGeom>
-          <a:noFill/>
-          <a:ln/>
-        </p:spPr>
-        <p:txBody>
-          <a:bodyPr wrap="square" lIns="0" tIns="0" rIns="0" bIns="0" rtlCol="0" anchor="t"/>
-          <a:lstStyle/>
-          <a:p>
-            <a:pPr algn="l" indent="0" marL="0">
-              <a:lnSpc>
-                <a:spcPts val="1680"/>
-              </a:lnSpc>
-              <a:spcBef>
-                <a:spcPts val="300"/>
-              </a:spcBef>
-              <a:spcAft>
-                <a:spcPts val="300"/>
-              </a:spcAft>
-              <a:buNone/>
-            </a:pPr>
-            <a:r>
-              <a:rPr lang="en-US" sz="1200" dirty="0">
-                <a:solidFill>
-                  <a:srgbClr val="2C2C2C"/>
-                </a:solidFill>
-                <a:latin typeface="Verdana" pitchFamily="34" charset="0"/>
-                <a:ea typeface="Verdana" pitchFamily="34" charset="-122"/>
-                <a:cs typeface="Verdana" pitchFamily="34" charset="-120"/>
-              </a:rPr>
-              <a:t>Sit on the mat. Teacher:</a:t>
-            </a:r>
-            <a:endParaRPr lang="en-US" sz="1200" dirty="0"/>
-          </a:p>
-        </p:txBody>
-      </p:sp>
-      <p:sp>
-        <p:nvSpPr>
-          <p:cNvPr id="5" name="Text 3"/>
-          <p:cNvSpPr/>
-          <p:nvPr/>
-        </p:nvSpPr>
-        <p:spPr>
-          <a:xfrm>
-            <a:off x="406301" y="1173063"/>
-            <a:ext cx="8331398" cy="842963"/>
-          </a:xfrm>
-          <a:prstGeom prst="rect">
-            <a:avLst/>
-          </a:prstGeom>
-          <a:solidFill>
-            <a:srgbClr val="FFFFFF"/>
-          </a:solidFill>
-          <a:ln/>
-        </p:spPr>
-        <p:txBody>
-          <a:bodyPr wrap="square" rtlCol="0" anchor="ctr"/>
-          <a:lstStyle/>
-          <a:p>
-            <a:pPr indent="0" marL="0">
-              <a:buNone/>
-            </a:pPr>
-            <a:endParaRPr lang="en-US" dirty="0"/>
-          </a:p>
-        </p:txBody>
-      </p:sp>
-      <p:sp>
-        <p:nvSpPr>
-          <p:cNvPr id="6" name="Shape 4"/>
-          <p:cNvSpPr/>
-          <p:nvPr/>
-        </p:nvSpPr>
-        <p:spPr>
-          <a:xfrm>
-            <a:off x="434876" y="1173063"/>
-            <a:ext cx="0" cy="842963"/>
-          </a:xfrm>
-          <a:prstGeom prst="line">
-            <a:avLst/>
-          </a:prstGeom>
-          <a:noFill/>
-          <a:ln w="57150">
-            <a:solidFill>
-              <a:srgbClr val="E07A5F"/>
-            </a:solidFill>
-            <a:prstDash val="solid"/>
-          </a:ln>
-        </p:spPr>
-      </p:sp>
-      <p:sp>
-        <p:nvSpPr>
-          <p:cNvPr id="7" name="Text 5"/>
-          <p:cNvSpPr/>
-          <p:nvPr/>
-        </p:nvSpPr>
-        <p:spPr>
-          <a:xfrm>
-            <a:off x="692051" y="1363563"/>
-            <a:ext cx="7973389" cy="461963"/>
-          </a:xfrm>
-          <a:prstGeom prst="rect">
-            <a:avLst/>
-          </a:prstGeom>
-          <a:noFill/>
-          <a:ln/>
-        </p:spPr>
-        <p:txBody>
-          <a:bodyPr wrap="square" lIns="0" tIns="0" rIns="0" bIns="0" rtlCol="0" anchor="t"/>
-          <a:lstStyle/>
-          <a:p>
-            <a:pPr algn="l" indent="0" marL="0">
-              <a:lnSpc>
-                <a:spcPts val="1820"/>
-              </a:lnSpc>
-              <a:spcBef>
-                <a:spcPts val="300"/>
-              </a:spcBef>
-              <a:spcAft>
-                <a:spcPts val="300"/>
-              </a:spcAft>
-              <a:buNone/>
-            </a:pPr>
-            <a:r>
-              <a:rPr lang="en-US" sz="1300" i="1" dirty="0">
-                <a:solidFill>
-                  <a:srgbClr val="2C2C2C"/>
-                </a:solidFill>
-                <a:latin typeface="Georgia" pitchFamily="34" charset="0"/>
-                <a:ea typeface="Georgia" pitchFamily="34" charset="-122"/>
-                <a:cs typeface="Georgia" pitchFamily="34" charset="-120"/>
-              </a:rPr>
-              <a:t>"For the next two weeks we'll meet some friends. They're tiny — but very important. Numbers have friends too."</a:t>
-            </a:r>
-            <a:endParaRPr lang="en-US" sz="1300" dirty="0"/>
-          </a:p>
-        </p:txBody>
-      </p:sp>
-      <p:sp>
-        <p:nvSpPr>
-          <p:cNvPr id="8" name="Text 6"/>
-          <p:cNvSpPr/>
-          <p:nvPr/>
-        </p:nvSpPr>
-        <p:spPr>
-          <a:xfrm>
-            <a:off x="406301" y="2104876"/>
-            <a:ext cx="8498026" cy="213271"/>
-          </a:xfrm>
-          <a:prstGeom prst="rect">
-            <a:avLst/>
-          </a:prstGeom>
-          <a:noFill/>
-          <a:ln/>
-        </p:spPr>
-        <p:txBody>
-          <a:bodyPr wrap="square" lIns="0" tIns="0" rIns="0" bIns="0" rtlCol="0" anchor="t"/>
-          <a:lstStyle/>
-          <a:p>
-            <a:pPr algn="l" indent="0" marL="0">
-              <a:lnSpc>
-                <a:spcPts val="1680"/>
-              </a:lnSpc>
-              <a:spcBef>
-                <a:spcPts val="300"/>
-              </a:spcBef>
-              <a:spcAft>
-                <a:spcPts val="300"/>
-              </a:spcAft>
-              <a:buNone/>
-            </a:pPr>
-            <a:r>
-              <a:rPr lang="en-US" sz="1200" dirty="0">
-                <a:solidFill>
-                  <a:srgbClr val="2C2C2C"/>
-                </a:solidFill>
-                <a:latin typeface="Verdana" pitchFamily="34" charset="0"/>
-                <a:ea typeface="Verdana" pitchFamily="34" charset="-122"/>
-                <a:cs typeface="Verdana" pitchFamily="34" charset="-120"/>
-              </a:rPr>
-              <a:t>Teach the chant (3 times, claps on each pair):</a:t>
-            </a:r>
-            <a:endParaRPr lang="en-US" sz="1200" dirty="0"/>
-          </a:p>
-        </p:txBody>
-      </p:sp>
-      <p:sp>
-        <p:nvSpPr>
-          <p:cNvPr id="9" name="Text 7"/>
-          <p:cNvSpPr/>
-          <p:nvPr/>
-        </p:nvSpPr>
-        <p:spPr>
-          <a:xfrm>
-            <a:off x="406301" y="2406997"/>
-            <a:ext cx="8331398" cy="842963"/>
-          </a:xfrm>
-          <a:prstGeom prst="rect">
-            <a:avLst/>
-          </a:prstGeom>
-          <a:solidFill>
-            <a:srgbClr val="FFFFFF"/>
-          </a:solidFill>
-          <a:ln/>
-        </p:spPr>
-        <p:txBody>
-          <a:bodyPr wrap="square" rtlCol="0" anchor="ctr"/>
-          <a:lstStyle/>
-          <a:p>
-            <a:pPr indent="0" marL="0">
-              <a:buNone/>
-            </a:pPr>
-            <a:endParaRPr lang="en-US" dirty="0"/>
-          </a:p>
-        </p:txBody>
-      </p:sp>
-      <p:sp>
-        <p:nvSpPr>
-          <p:cNvPr id="10" name="Shape 8"/>
-          <p:cNvSpPr/>
-          <p:nvPr/>
-        </p:nvSpPr>
-        <p:spPr>
-          <a:xfrm>
-            <a:off x="434876" y="2406997"/>
-            <a:ext cx="0" cy="842963"/>
-          </a:xfrm>
-          <a:prstGeom prst="line">
-            <a:avLst/>
-          </a:prstGeom>
-          <a:noFill/>
-          <a:ln w="57150">
-            <a:solidFill>
-              <a:srgbClr val="E07A5F"/>
-            </a:solidFill>
-            <a:prstDash val="solid"/>
-          </a:ln>
-        </p:spPr>
-      </p:sp>
-      <p:sp>
-        <p:nvSpPr>
-          <p:cNvPr id="11" name="Text 9"/>
-          <p:cNvSpPr/>
-          <p:nvPr/>
-        </p:nvSpPr>
-        <p:spPr>
-          <a:xfrm>
-            <a:off x="692051" y="2597497"/>
-            <a:ext cx="7973389" cy="461963"/>
-          </a:xfrm>
-          <a:prstGeom prst="rect">
-            <a:avLst/>
-          </a:prstGeom>
-          <a:noFill/>
-          <a:ln/>
-        </p:spPr>
-        <p:txBody>
-          <a:bodyPr wrap="square" lIns="0" tIns="0" rIns="0" bIns="0" rtlCol="0" anchor="t"/>
-          <a:lstStyle/>
-          <a:p>
-            <a:pPr algn="l" indent="0" marL="0">
-              <a:lnSpc>
-                <a:spcPts val="1820"/>
-              </a:lnSpc>
-              <a:spcBef>
-                <a:spcPts val="300"/>
-              </a:spcBef>
-              <a:spcAft>
-                <a:spcPts val="300"/>
-              </a:spcAft>
-              <a:buNone/>
-            </a:pPr>
-            <a:r>
-              <a:rPr lang="en-US" sz="1300" i="1" dirty="0">
-                <a:solidFill>
-                  <a:srgbClr val="2C2C2C"/>
-                </a:solidFill>
-                <a:latin typeface="Georgia" pitchFamily="34" charset="0"/>
-                <a:ea typeface="Georgia" pitchFamily="34" charset="-122"/>
-                <a:cs typeface="Georgia" pitchFamily="34" charset="-120"/>
-              </a:rPr>
-              <a:t>"1 and 9 are friends! 2 and 8 are friends! 3 and 7 are friends! 4 and 6 are friends! 5 and 5 are best friends! All make TEN!"</a:t>
-            </a:r>
-            <a:endParaRPr lang="en-US" sz="1300" dirty="0"/>
-          </a:p>
-        </p:txBody>
-      </p:sp>
-      <p:sp>
-        <p:nvSpPr>
-          <p:cNvPr id="12" name="Text 10"/>
           <p:cNvSpPr/>
           <p:nvPr/>
         </p:nvSpPr>
@@ -3575,7 +4575,7 @@
                 <a:ea typeface="Georgia" pitchFamily="34" charset="-122"/>
                 <a:cs typeface="Georgia" pitchFamily="34" charset="-120"/>
               </a:rPr>
-              <a:t>Story (5 min)</a:t>
+              <a:t>Settle + chant (5 min)</a:t>
             </a:r>
             <a:endParaRPr lang="en-US" sz="1800" dirty="0"/>
           </a:p>
@@ -3589,8 +4589,56 @@
         </p:nvSpPr>
         <p:spPr>
           <a:xfrm>
-            <a:off x="406301" y="883593"/>
-            <a:ext cx="8331398" cy="2457450"/>
+            <a:off x="406301" y="870942"/>
+            <a:ext cx="8498026" cy="213271"/>
+          </a:xfrm>
+          <a:prstGeom prst="rect">
+            <a:avLst/>
+          </a:prstGeom>
+          <a:noFill/>
+          <a:ln/>
+        </p:spPr>
+        <p:txBody>
+          <a:bodyPr wrap="square" lIns="0" tIns="0" rIns="0" bIns="0" rtlCol="0" anchor="t"/>
+          <a:lstStyle/>
+          <a:p>
+            <a:pPr algn="l" indent="0" marL="0">
+              <a:lnSpc>
+                <a:spcPts val="1680"/>
+              </a:lnSpc>
+              <a:spcBef>
+                <a:spcPts val="300"/>
+              </a:spcBef>
+              <a:spcAft>
+                <a:spcPts val="300"/>
+              </a:spcAft>
+              <a:buNone/>
+            </a:pPr>
+            <a:r>
+              <a:rPr lang="en-US" sz="1200" dirty="0">
+                <a:solidFill>
+                  <a:srgbClr val="2C2C2C"/>
+                </a:solidFill>
+                <a:latin typeface="Verdana" pitchFamily="34" charset="0"/>
+                <a:ea typeface="Verdana" pitchFamily="34" charset="-122"/>
+                <a:cs typeface="Verdana" pitchFamily="34" charset="-120"/>
+              </a:rPr>
+              <a:t>Sit on the mat. Teacher:</a:t>
+            </a:r>
+            <a:endParaRPr lang="en-US" sz="1200" dirty="0"/>
+          </a:p>
+        </p:txBody>
+      </p:sp>
+      <p:sp>
+        <p:nvSpPr>
+          <p:cNvPr id="5" name="Text 3"/>
+          <p:cNvSpPr/>
+          <p:nvPr/>
+        </p:nvSpPr>
+        <p:spPr>
+          <a:xfrm>
+            <a:off x="406301" y="1173063"/>
+            <a:ext cx="8331398" cy="842963"/>
           </a:xfrm>
           <a:prstGeom prst="rect">
             <a:avLst/>
@@ -3613,14 +4661,14 @@
       </p:sp>
       <p:sp>
         <p:nvSpPr>
-          <p:cNvPr id="5" name="Shape 3"/>
-          <p:cNvSpPr/>
-          <p:nvPr/>
-        </p:nvSpPr>
-        <p:spPr>
-          <a:xfrm>
-            <a:off x="434876" y="883593"/>
-            <a:ext cx="0" cy="2457450"/>
+          <p:cNvPr id="6" name="Shape 4"/>
+          <p:cNvSpPr/>
+          <p:nvPr/>
+        </p:nvSpPr>
+        <p:spPr>
+          <a:xfrm>
+            <a:off x="434876" y="1173063"/>
+            <a:ext cx="0" cy="842963"/>
           </a:xfrm>
           <a:prstGeom prst="line">
             <a:avLst/>
@@ -3636,14 +4684,14 @@
       </p:sp>
       <p:sp>
         <p:nvSpPr>
-          <p:cNvPr id="6" name="Text 4"/>
-          <p:cNvSpPr/>
-          <p:nvPr/>
-        </p:nvSpPr>
-        <p:spPr>
-          <a:xfrm>
-            <a:off x="692051" y="1074093"/>
-            <a:ext cx="7973389" cy="230981"/>
+          <p:cNvPr id="7" name="Text 5"/>
+          <p:cNvSpPr/>
+          <p:nvPr/>
+        </p:nvSpPr>
+        <p:spPr>
+          <a:xfrm>
+            <a:off x="692051" y="1363563"/>
+            <a:ext cx="7973389" cy="461963"/>
           </a:xfrm>
           <a:prstGeom prst="rect">
             <a:avLst/>
@@ -3668,7 +4716,7 @@
               <a:buNone/>
             </a:pPr>
             <a:r>
-              <a:rPr lang="en-US" sz="1300" b="1" i="1" dirty="0">
+              <a:rPr lang="en-US" sz="1300" i="1" dirty="0">
                 <a:solidFill>
                   <a:srgbClr val="2C2C2C"/>
                 </a:solidFill>
@@ -3676,7 +4724,7 @@
                 <a:ea typeface="Georgia" pitchFamily="34" charset="-122"/>
                 <a:cs typeface="Georgia" pitchFamily="34" charset="-120"/>
               </a:rPr>
-              <a:t>The Friend Game</a:t>
+              <a:t>"For the next two weeks we'll meet some friends. They're tiny — but very important. Numbers have friends too."</a:t>
             </a:r>
             <a:endParaRPr lang="en-US" sz="1300" dirty="0"/>
           </a:p>
@@ -3684,14 +4732,14 @@
       </p:sp>
       <p:sp>
         <p:nvSpPr>
-          <p:cNvPr id="7" name="Text 5"/>
-          <p:cNvSpPr/>
-          <p:nvPr/>
-        </p:nvSpPr>
-        <p:spPr>
-          <a:xfrm>
-            <a:off x="692051" y="1343174"/>
-            <a:ext cx="7973389" cy="230981"/>
+          <p:cNvPr id="8" name="Text 6"/>
+          <p:cNvSpPr/>
+          <p:nvPr/>
+        </p:nvSpPr>
+        <p:spPr>
+          <a:xfrm>
+            <a:off x="406301" y="2104876"/>
+            <a:ext cx="8498026" cy="213271"/>
           </a:xfrm>
           <a:prstGeom prst="rect">
             <a:avLst/>
@@ -3705,7 +4753,7 @@
           <a:p>
             <a:pPr algn="l" indent="0" marL="0">
               <a:lnSpc>
-                <a:spcPts val="1820"/>
+                <a:spcPts val="1680"/>
               </a:lnSpc>
               <a:spcBef>
                 <a:spcPts val="300"/>
@@ -3716,401 +4764,23 @@
               <a:buNone/>
             </a:pPr>
             <a:r>
-              <a:rPr lang="en-US" sz="1300" i="1" dirty="0">
+              <a:rPr lang="en-US" sz="1200" dirty="0">
                 <a:solidFill>
                   <a:srgbClr val="2C2C2C"/>
                 </a:solidFill>
-                <a:latin typeface="Georgia" pitchFamily="34" charset="0"/>
-                <a:ea typeface="Georgia" pitchFamily="34" charset="-122"/>
-                <a:cs typeface="Georgia" pitchFamily="34" charset="-120"/>
-              </a:rPr>
-              <a:t>Ten little ants lived on a leaf. Sometimes they walked off in groups.</a:t>
-            </a:r>
-            <a:endParaRPr lang="en-US" sz="1300" dirty="0"/>
-          </a:p>
-        </p:txBody>
-      </p:sp>
-      <p:sp>
-        <p:nvSpPr>
-          <p:cNvPr id="8" name="Text 6"/>
-          <p:cNvSpPr/>
-          <p:nvPr/>
-        </p:nvSpPr>
-        <p:spPr>
-          <a:xfrm>
-            <a:off x="692051" y="1612255"/>
-            <a:ext cx="7973389" cy="461963"/>
-          </a:xfrm>
-          <a:prstGeom prst="rect">
-            <a:avLst/>
-          </a:prstGeom>
-          <a:noFill/>
-          <a:ln/>
-        </p:spPr>
-        <p:txBody>
-          <a:bodyPr wrap="square" lIns="0" tIns="0" rIns="0" bIns="0" rtlCol="0" anchor="t"/>
-          <a:lstStyle/>
-          <a:p>
-            <a:pPr algn="l" indent="0" marL="0">
-              <a:lnSpc>
-                <a:spcPts val="1820"/>
-              </a:lnSpc>
-              <a:spcBef>
-                <a:spcPts val="300"/>
-              </a:spcBef>
-              <a:spcAft>
-                <a:spcPts val="300"/>
-              </a:spcAft>
-              <a:buNone/>
-            </a:pPr>
-            <a:r>
-              <a:rPr lang="en-US" sz="1300" dirty="0">
-                <a:solidFill>
-                  <a:srgbClr val="2C2C2C"/>
-                </a:solidFill>
-                <a:latin typeface="Georgia" pitchFamily="34" charset="0"/>
-                <a:ea typeface="Georgia" pitchFamily="34" charset="-122"/>
-                <a:cs typeface="Georgia" pitchFamily="34" charset="-120"/>
-              </a:rPr>
-              <a:t>One day, 3 ants walked off. </a:t>
-            </a:r>
-            <a:pPr algn="l" indent="0" marL="0">
-              <a:lnSpc>
-                <a:spcPts val="1820"/>
-              </a:lnSpc>
-              <a:spcBef>
-                <a:spcPts val="300"/>
-              </a:spcBef>
-              <a:spcAft>
-                <a:spcPts val="300"/>
-              </a:spcAft>
-              <a:buNone/>
-            </a:pPr>
-            <a:r>
-              <a:rPr lang="en-US" sz="1300" i="1" dirty="0">
-                <a:solidFill>
-                  <a:srgbClr val="2C2C2C"/>
-                </a:solidFill>
-                <a:latin typeface="Georgia" pitchFamily="34" charset="0"/>
-                <a:ea typeface="Georgia" pitchFamily="34" charset="-122"/>
-                <a:cs typeface="Georgia" pitchFamily="34" charset="-120"/>
-              </a:rPr>
-              <a:t>(Hold up 3 fingers.)</a:t>
-            </a:r>
-            <a:pPr algn="l" indent="0" marL="0">
-              <a:lnSpc>
-                <a:spcPts val="1820"/>
-              </a:lnSpc>
-              <a:spcBef>
-                <a:spcPts val="300"/>
-              </a:spcBef>
-              <a:spcAft>
-                <a:spcPts val="300"/>
-              </a:spcAft>
-              <a:buNone/>
-            </a:pPr>
-            <a:r>
-              <a:rPr lang="en-US" sz="1300" dirty="0">
-                <a:solidFill>
-                  <a:srgbClr val="2C2C2C"/>
-                </a:solidFill>
-                <a:latin typeface="Georgia" pitchFamily="34" charset="0"/>
-                <a:ea typeface="Georgia" pitchFamily="34" charset="-122"/>
-                <a:cs typeface="Georgia" pitchFamily="34" charset="-120"/>
-              </a:rPr>
-              <a:t> How many were left behind on the leaf? </a:t>
-            </a:r>
-            <a:pPr algn="l" indent="0" marL="0">
-              <a:lnSpc>
-                <a:spcPts val="1820"/>
-              </a:lnSpc>
-              <a:spcBef>
-                <a:spcPts val="300"/>
-              </a:spcBef>
-              <a:spcAft>
-                <a:spcPts val="300"/>
-              </a:spcAft>
-              <a:buNone/>
-            </a:pPr>
-            <a:r>
-              <a:rPr lang="en-US" sz="1300" i="1" dirty="0">
-                <a:solidFill>
-                  <a:srgbClr val="2C2C2C"/>
-                </a:solidFill>
-                <a:latin typeface="Georgia" pitchFamily="34" charset="0"/>
-                <a:ea typeface="Georgia" pitchFamily="34" charset="-122"/>
-                <a:cs typeface="Georgia" pitchFamily="34" charset="-120"/>
-              </a:rPr>
-              <a:t>(Wait. Children call out: 7!)</a:t>
-            </a:r>
-            <a:endParaRPr lang="en-US" sz="1300" dirty="0"/>
+                <a:latin typeface="Verdana" pitchFamily="34" charset="0"/>
+                <a:ea typeface="Verdana" pitchFamily="34" charset="-122"/>
+                <a:cs typeface="Verdana" pitchFamily="34" charset="-120"/>
+              </a:rPr>
+              <a:t>Teach the chant (3 times, claps on each pair):</a:t>
+            </a:r>
+            <a:endParaRPr lang="en-US" sz="1200" dirty="0"/>
           </a:p>
         </p:txBody>
       </p:sp>
       <p:sp>
         <p:nvSpPr>
           <p:cNvPr id="9" name="Text 7"/>
-          <p:cNvSpPr/>
-          <p:nvPr/>
-        </p:nvSpPr>
-        <p:spPr>
-          <a:xfrm>
-            <a:off x="692051" y="2112318"/>
-            <a:ext cx="7973389" cy="230981"/>
-          </a:xfrm>
-          <a:prstGeom prst="rect">
-            <a:avLst/>
-          </a:prstGeom>
-          <a:noFill/>
-          <a:ln/>
-        </p:spPr>
-        <p:txBody>
-          <a:bodyPr wrap="square" lIns="0" tIns="0" rIns="0" bIns="0" rtlCol="0" anchor="t"/>
-          <a:lstStyle/>
-          <a:p>
-            <a:pPr algn="l" indent="0" marL="0">
-              <a:lnSpc>
-                <a:spcPts val="1820"/>
-              </a:lnSpc>
-              <a:spcBef>
-                <a:spcPts val="300"/>
-              </a:spcBef>
-              <a:spcAft>
-                <a:spcPts val="300"/>
-              </a:spcAft>
-              <a:buNone/>
-            </a:pPr>
-            <a:r>
-              <a:rPr lang="en-US" sz="1300" i="1" dirty="0">
-                <a:solidFill>
-                  <a:srgbClr val="2C2C2C"/>
-                </a:solidFill>
-                <a:latin typeface="Georgia" pitchFamily="34" charset="0"/>
-                <a:ea typeface="Georgia" pitchFamily="34" charset="-122"/>
-                <a:cs typeface="Georgia" pitchFamily="34" charset="-120"/>
-              </a:rPr>
-              <a:t>Yes! 3 and 7 are friends. They always make 10 together.</a:t>
-            </a:r>
-            <a:endParaRPr lang="en-US" sz="1300" dirty="0"/>
-          </a:p>
-        </p:txBody>
-      </p:sp>
-      <p:sp>
-        <p:nvSpPr>
-          <p:cNvPr id="10" name="Text 8"/>
-          <p:cNvSpPr/>
-          <p:nvPr/>
-        </p:nvSpPr>
-        <p:spPr>
-          <a:xfrm>
-            <a:off x="692051" y="2381399"/>
-            <a:ext cx="7973389" cy="230981"/>
-          </a:xfrm>
-          <a:prstGeom prst="rect">
-            <a:avLst/>
-          </a:prstGeom>
-          <a:noFill/>
-          <a:ln/>
-        </p:spPr>
-        <p:txBody>
-          <a:bodyPr wrap="square" lIns="0" tIns="0" rIns="0" bIns="0" rtlCol="0" anchor="t"/>
-          <a:lstStyle/>
-          <a:p>
-            <a:pPr algn="l" indent="0" marL="0">
-              <a:lnSpc>
-                <a:spcPts val="1820"/>
-              </a:lnSpc>
-              <a:spcBef>
-                <a:spcPts val="300"/>
-              </a:spcBef>
-              <a:spcAft>
-                <a:spcPts val="300"/>
-              </a:spcAft>
-              <a:buNone/>
-            </a:pPr>
-            <a:r>
-              <a:rPr lang="en-US" sz="1300" dirty="0">
-                <a:solidFill>
-                  <a:srgbClr val="2C2C2C"/>
-                </a:solidFill>
-                <a:latin typeface="Georgia" pitchFamily="34" charset="0"/>
-                <a:ea typeface="Georgia" pitchFamily="34" charset="-122"/>
-                <a:cs typeface="Georgia" pitchFamily="34" charset="-120"/>
-              </a:rPr>
-              <a:t>Another day, 6 ants walked off. </a:t>
-            </a:r>
-            <a:pPr algn="l" indent="0" marL="0">
-              <a:lnSpc>
-                <a:spcPts val="1820"/>
-              </a:lnSpc>
-              <a:spcBef>
-                <a:spcPts val="300"/>
-              </a:spcBef>
-              <a:spcAft>
-                <a:spcPts val="300"/>
-              </a:spcAft>
-              <a:buNone/>
-            </a:pPr>
-            <a:r>
-              <a:rPr lang="en-US" sz="1300" i="1" dirty="0">
-                <a:solidFill>
-                  <a:srgbClr val="2C2C2C"/>
-                </a:solidFill>
-                <a:latin typeface="Georgia" pitchFamily="34" charset="0"/>
-                <a:ea typeface="Georgia" pitchFamily="34" charset="-122"/>
-                <a:cs typeface="Georgia" pitchFamily="34" charset="-120"/>
-              </a:rPr>
-              <a:t>(Hold up 6.)</a:t>
-            </a:r>
-            <a:pPr algn="l" indent="0" marL="0">
-              <a:lnSpc>
-                <a:spcPts val="1820"/>
-              </a:lnSpc>
-              <a:spcBef>
-                <a:spcPts val="300"/>
-              </a:spcBef>
-              <a:spcAft>
-                <a:spcPts val="300"/>
-              </a:spcAft>
-              <a:buNone/>
-            </a:pPr>
-            <a:r>
-              <a:rPr lang="en-US" sz="1300" dirty="0">
-                <a:solidFill>
-                  <a:srgbClr val="2C2C2C"/>
-                </a:solidFill>
-                <a:latin typeface="Georgia" pitchFamily="34" charset="0"/>
-                <a:ea typeface="Georgia" pitchFamily="34" charset="-122"/>
-                <a:cs typeface="Georgia" pitchFamily="34" charset="-120"/>
-              </a:rPr>
-              <a:t> How many on the leaf? </a:t>
-            </a:r>
-            <a:pPr algn="l" indent="0" marL="0">
-              <a:lnSpc>
-                <a:spcPts val="1820"/>
-              </a:lnSpc>
-              <a:spcBef>
-                <a:spcPts val="300"/>
-              </a:spcBef>
-              <a:spcAft>
-                <a:spcPts val="300"/>
-              </a:spcAft>
-              <a:buNone/>
-            </a:pPr>
-            <a:r>
-              <a:rPr lang="en-US" sz="1300" i="1" dirty="0">
-                <a:solidFill>
-                  <a:srgbClr val="2C2C2C"/>
-                </a:solidFill>
-                <a:latin typeface="Georgia" pitchFamily="34" charset="0"/>
-                <a:ea typeface="Georgia" pitchFamily="34" charset="-122"/>
-                <a:cs typeface="Georgia" pitchFamily="34" charset="-120"/>
-              </a:rPr>
-              <a:t>(4!)</a:t>
-            </a:r>
-            <a:endParaRPr lang="en-US" sz="1300" dirty="0"/>
-          </a:p>
-        </p:txBody>
-      </p:sp>
-      <p:sp>
-        <p:nvSpPr>
-          <p:cNvPr id="11" name="Text 9"/>
-          <p:cNvSpPr/>
-          <p:nvPr/>
-        </p:nvSpPr>
-        <p:spPr>
-          <a:xfrm>
-            <a:off x="692051" y="2650480"/>
-            <a:ext cx="7973389" cy="230981"/>
-          </a:xfrm>
-          <a:prstGeom prst="rect">
-            <a:avLst/>
-          </a:prstGeom>
-          <a:noFill/>
-          <a:ln/>
-        </p:spPr>
-        <p:txBody>
-          <a:bodyPr wrap="square" lIns="0" tIns="0" rIns="0" bIns="0" rtlCol="0" anchor="t"/>
-          <a:lstStyle/>
-          <a:p>
-            <a:pPr algn="l" indent="0" marL="0">
-              <a:lnSpc>
-                <a:spcPts val="1820"/>
-              </a:lnSpc>
-              <a:spcBef>
-                <a:spcPts val="300"/>
-              </a:spcBef>
-              <a:spcAft>
-                <a:spcPts val="300"/>
-              </a:spcAft>
-              <a:buNone/>
-            </a:pPr>
-            <a:r>
-              <a:rPr lang="en-US" sz="1300" i="1" dirty="0">
-                <a:solidFill>
-                  <a:srgbClr val="2C2C2C"/>
-                </a:solidFill>
-                <a:latin typeface="Georgia" pitchFamily="34" charset="0"/>
-                <a:ea typeface="Georgia" pitchFamily="34" charset="-122"/>
-                <a:cs typeface="Georgia" pitchFamily="34" charset="-120"/>
-              </a:rPr>
-              <a:t>6 and 4 are friends. Always 10.</a:t>
-            </a:r>
-            <a:endParaRPr lang="en-US" sz="1300" dirty="0"/>
-          </a:p>
-        </p:txBody>
-      </p:sp>
-      <p:sp>
-        <p:nvSpPr>
-          <p:cNvPr id="12" name="Text 10"/>
-          <p:cNvSpPr/>
-          <p:nvPr/>
-        </p:nvSpPr>
-        <p:spPr>
-          <a:xfrm>
-            <a:off x="692051" y="2919561"/>
-            <a:ext cx="7973389" cy="230981"/>
-          </a:xfrm>
-          <a:prstGeom prst="rect">
-            <a:avLst/>
-          </a:prstGeom>
-          <a:noFill/>
-          <a:ln/>
-        </p:spPr>
-        <p:txBody>
-          <a:bodyPr wrap="square" lIns="0" tIns="0" rIns="0" bIns="0" rtlCol="0" anchor="t"/>
-          <a:lstStyle/>
-          <a:p>
-            <a:pPr algn="l" indent="0" marL="0">
-              <a:lnSpc>
-                <a:spcPts val="1820"/>
-              </a:lnSpc>
-              <a:spcBef>
-                <a:spcPts val="300"/>
-              </a:spcBef>
-              <a:spcAft>
-                <a:spcPts val="300"/>
-              </a:spcAft>
-              <a:buNone/>
-            </a:pPr>
-            <a:r>
-              <a:rPr lang="en-US" sz="1300" i="1" dirty="0">
-                <a:solidFill>
-                  <a:srgbClr val="2C2C2C"/>
-                </a:solidFill>
-                <a:latin typeface="Georgia" pitchFamily="34" charset="0"/>
-                <a:ea typeface="Georgia" pitchFamily="34" charset="-122"/>
-                <a:cs typeface="Georgia" pitchFamily="34" charset="-120"/>
-              </a:rPr>
-              <a:t>Every number from 0 to 10 has a friend. We'll meet them all today.</a:t>
-            </a:r>
-            <a:endParaRPr lang="en-US" sz="1300" dirty="0"/>
-          </a:p>
-        </p:txBody>
-      </p:sp>
-      <p:sp>
-        <p:nvSpPr>
-          <p:cNvPr id="13" name="Text 11"/>
           <p:cNvSpPr/>
           <p:nvPr/>
         </p:nvSpPr>
@@ -4260,7 +4930,7 @@
                 <a:ea typeface="Georgia" pitchFamily="34" charset="-122"/>
                 <a:cs typeface="Georgia" pitchFamily="34" charset="-120"/>
               </a:rPr>
-              <a:t>Card game: Make Ten (20 min)</a:t>
+              <a:t>Settle + chant (5 min) (cont.)</a:t>
             </a:r>
             <a:endParaRPr lang="en-US" sz="1800" dirty="0"/>
           </a:p>
@@ -4274,13 +4944,66 @@
         </p:nvSpPr>
         <p:spPr>
           <a:xfrm>
-            <a:off x="406301" y="870942"/>
-            <a:ext cx="8498026" cy="213271"/>
-          </a:xfrm>
-          <a:prstGeom prst="rect">
+            <a:off x="406301" y="883593"/>
+            <a:ext cx="8331398" cy="842963"/>
+          </a:xfrm>
+          <a:prstGeom prst="rect">
+            <a:avLst/>
+          </a:prstGeom>
+          <a:solidFill>
+            <a:srgbClr val="FFFFFF"/>
+          </a:solidFill>
+          <a:ln/>
+        </p:spPr>
+        <p:txBody>
+          <a:bodyPr wrap="square" rtlCol="0" anchor="ctr"/>
+          <a:lstStyle/>
+          <a:p>
+            <a:pPr indent="0" marL="0">
+              <a:buNone/>
+            </a:pPr>
+            <a:endParaRPr lang="en-US" dirty="0"/>
+          </a:p>
+        </p:txBody>
+      </p:sp>
+      <p:sp>
+        <p:nvSpPr>
+          <p:cNvPr id="5" name="Shape 3"/>
+          <p:cNvSpPr/>
+          <p:nvPr/>
+        </p:nvSpPr>
+        <p:spPr>
+          <a:xfrm>
+            <a:off x="434876" y="883593"/>
+            <a:ext cx="0" cy="842963"/>
+          </a:xfrm>
+          <a:prstGeom prst="line">
             <a:avLst/>
           </a:prstGeom>
           <a:noFill/>
+          <a:ln w="57150">
+            <a:solidFill>
+              <a:srgbClr val="E07A5F"/>
+            </a:solidFill>
+            <a:prstDash val="solid"/>
+          </a:ln>
+        </p:spPr>
+      </p:sp>
+      <p:sp>
+        <p:nvSpPr>
+          <p:cNvPr id="6" name="Text 4"/>
+          <p:cNvSpPr/>
+          <p:nvPr/>
+        </p:nvSpPr>
+        <p:spPr>
+          <a:xfrm>
+            <a:off x="692051" y="1074093"/>
+            <a:ext cx="7973389" cy="461963"/>
+          </a:xfrm>
+          <a:prstGeom prst="rect">
+            <a:avLst/>
+          </a:prstGeom>
+          <a:noFill/>
           <a:ln/>
         </p:spPr>
         <p:txBody>
@@ -4289,7 +5012,7 @@
           <a:p>
             <a:pPr algn="l" indent="0" marL="0">
               <a:lnSpc>
-                <a:spcPts val="1680"/>
+                <a:spcPts val="1820"/>
               </a:lnSpc>
               <a:spcBef>
                 <a:spcPts val="300"/>
@@ -4300,259 +5023,23 @@
               <a:buNone/>
             </a:pPr>
             <a:r>
-              <a:rPr lang="en-US" sz="1200" b="1" dirty="0">
+              <a:rPr lang="en-US" sz="1300" i="1" dirty="0">
                 <a:solidFill>
                   <a:srgbClr val="2C2C2C"/>
                 </a:solidFill>
-                <a:latin typeface="Verdana" pitchFamily="34" charset="0"/>
-                <a:ea typeface="Verdana" pitchFamily="34" charset="-122"/>
-                <a:cs typeface="Verdana" pitchFamily="34" charset="-120"/>
-              </a:rPr>
-              <a:t>How to play (paired):</a:t>
-            </a:r>
-            <a:endParaRPr lang="en-US" sz="1200" dirty="0"/>
-          </a:p>
-        </p:txBody>
-      </p:sp>
-      <p:sp>
-        <p:nvSpPr>
-          <p:cNvPr id="5" name="Text 3"/>
-          <p:cNvSpPr/>
-          <p:nvPr/>
-        </p:nvSpPr>
-        <p:spPr>
-          <a:xfrm>
-            <a:off x="634901" y="1173063"/>
-            <a:ext cx="8102798" cy="525661"/>
-          </a:xfrm>
-          <a:prstGeom prst="rect">
-            <a:avLst/>
-          </a:prstGeom>
-          <a:noFill/>
-          <a:ln/>
-        </p:spPr>
-        <p:txBody>
-          <a:bodyPr wrap="square" lIns="0" tIns="0" rIns="0" bIns="0" rtlCol="0" anchor="t"/>
-          <a:lstStyle/>
-          <a:p>
-            <a:pPr algn="l" marL="342900" indent="-342900">
-              <a:lnSpc>
-                <a:spcPts val="1620"/>
-              </a:lnSpc>
-              <a:spcAft>
-                <a:spcPts val="300"/>
-              </a:spcAft>
-              <a:buSzPct val="100000"/>
-              <a:buChar char="•"/>
-            </a:pPr>
-            <a:r>
-              <a:rPr lang="en-US" sz="1200" dirty="0">
-                <a:solidFill>
-                  <a:srgbClr val="2C2C2C"/>
-                </a:solidFill>
-                <a:latin typeface="Verdana" pitchFamily="34" charset="0"/>
-                <a:ea typeface="Verdana" pitchFamily="34" charset="-122"/>
-                <a:cs typeface="Verdana" pitchFamily="34" charset="-120"/>
-              </a:rPr>
-              <a:t>Shuffle. Deal 5 cards to each player. Put 5 face-up in the middle.</a:t>
-            </a:r>
-            <a:endParaRPr lang="en-US" sz="1200" dirty="0"/>
-          </a:p>
-          <a:p>
-            <a:pPr algn="l" marL="342900" indent="-342900">
-              <a:lnSpc>
-                <a:spcPts val="1620"/>
-              </a:lnSpc>
-              <a:spcAft>
-                <a:spcPts val="300"/>
-              </a:spcAft>
-              <a:buSzPct val="100000"/>
-              <a:buChar char="•"/>
-            </a:pPr>
-            <a:r>
-              <a:rPr lang="en-US" sz="1200" dirty="0">
-                <a:solidFill>
-                  <a:srgbClr val="2C2C2C"/>
-                </a:solidFill>
-                <a:latin typeface="Verdana" pitchFamily="34" charset="0"/>
-                <a:ea typeface="Verdana" pitchFamily="34" charset="-122"/>
-                <a:cs typeface="Verdana" pitchFamily="34" charset="-120"/>
-              </a:rPr>
-              <a:t>On your turn:</a:t>
-            </a:r>
-            <a:endParaRPr lang="en-US" sz="1200" dirty="0"/>
-          </a:p>
-        </p:txBody>
-      </p:sp>
-      <p:sp>
-        <p:nvSpPr>
-          <p:cNvPr id="6" name="Text 4"/>
-          <p:cNvSpPr/>
-          <p:nvPr/>
-        </p:nvSpPr>
-        <p:spPr>
-          <a:xfrm>
-            <a:off x="406301" y="1787575"/>
-            <a:ext cx="8498026" cy="426541"/>
-          </a:xfrm>
-          <a:prstGeom prst="rect">
-            <a:avLst/>
-          </a:prstGeom>
-          <a:noFill/>
-          <a:ln/>
-        </p:spPr>
-        <p:txBody>
-          <a:bodyPr wrap="square" lIns="0" tIns="0" rIns="0" bIns="0" rtlCol="0" anchor="t"/>
-          <a:lstStyle/>
-          <a:p>
-            <a:pPr algn="l" indent="0" marL="0">
-              <a:lnSpc>
-                <a:spcPts val="1680"/>
-              </a:lnSpc>
-              <a:spcBef>
-                <a:spcPts val="300"/>
-              </a:spcBef>
-              <a:spcAft>
-                <a:spcPts val="300"/>
-              </a:spcAft>
-              <a:buNone/>
-            </a:pPr>
-            <a:r>
-              <a:rPr lang="en-US" sz="1200" dirty="0">
-                <a:solidFill>
-                  <a:srgbClr val="2C2C2C"/>
-                </a:solidFill>
-                <a:latin typeface="Verdana" pitchFamily="34" charset="0"/>
-                <a:ea typeface="Verdana" pitchFamily="34" charset="-122"/>
-                <a:cs typeface="Verdana" pitchFamily="34" charset="-120"/>
-              </a:rPr>
-              <a:t>– Look at your hand and the middle.    – Find two cards that are friends (add to 10).    – Take both. Put in your pile.    – Draw 1 from the deck.</a:t>
-            </a:r>
-            <a:endParaRPr lang="en-US" sz="1200" dirty="0"/>
+                <a:latin typeface="Georgia" pitchFamily="34" charset="0"/>
+                <a:ea typeface="Georgia" pitchFamily="34" charset="-122"/>
+                <a:cs typeface="Georgia" pitchFamily="34" charset="-120"/>
+              </a:rPr>
+              <a:t>"1 and 9 are friends! 2 and 8 are friends! 3 and 7 are friends! 4 and 6 are friends! 5 and 5 are best friends! All make TEN!"</a:t>
+            </a:r>
+            <a:endParaRPr lang="en-US" sz="1300" dirty="0"/>
           </a:p>
         </p:txBody>
       </p:sp>
       <p:sp>
         <p:nvSpPr>
           <p:cNvPr id="7" name="Text 5"/>
-          <p:cNvSpPr/>
-          <p:nvPr/>
-        </p:nvSpPr>
-        <p:spPr>
-          <a:xfrm>
-            <a:off x="634901" y="2302966"/>
-            <a:ext cx="8102798" cy="525661"/>
-          </a:xfrm>
-          <a:prstGeom prst="rect">
-            <a:avLst/>
-          </a:prstGeom>
-          <a:noFill/>
-          <a:ln/>
-        </p:spPr>
-        <p:txBody>
-          <a:bodyPr wrap="square" lIns="0" tIns="0" rIns="0" bIns="0" rtlCol="0" anchor="t"/>
-          <a:lstStyle/>
-          <a:p>
-            <a:pPr algn="l" marL="342900" indent="-342900">
-              <a:lnSpc>
-                <a:spcPts val="1620"/>
-              </a:lnSpc>
-              <a:spcAft>
-                <a:spcPts val="300"/>
-              </a:spcAft>
-              <a:buSzPct val="100000"/>
-              <a:buChar char="•"/>
-            </a:pPr>
-            <a:r>
-              <a:rPr lang="en-US" sz="1200" dirty="0">
-                <a:solidFill>
-                  <a:srgbClr val="2C2C2C"/>
-                </a:solidFill>
-                <a:latin typeface="Verdana" pitchFamily="34" charset="0"/>
-                <a:ea typeface="Verdana" pitchFamily="34" charset="-122"/>
-                <a:cs typeface="Verdana" pitchFamily="34" charset="-120"/>
-              </a:rPr>
-              <a:t>If you can't make 10, place 1 card in the middle. End turn.</a:t>
-            </a:r>
-            <a:endParaRPr lang="en-US" sz="1200" dirty="0"/>
-          </a:p>
-          <a:p>
-            <a:pPr algn="l" marL="342900" indent="-342900">
-              <a:lnSpc>
-                <a:spcPts val="1620"/>
-              </a:lnSpc>
-              <a:spcAft>
-                <a:spcPts val="300"/>
-              </a:spcAft>
-              <a:buSzPct val="100000"/>
-              <a:buChar char="•"/>
-            </a:pPr>
-            <a:r>
-              <a:rPr lang="en-US" sz="1200" dirty="0">
-                <a:solidFill>
-                  <a:srgbClr val="2C2C2C"/>
-                </a:solidFill>
-                <a:latin typeface="Verdana" pitchFamily="34" charset="0"/>
-                <a:ea typeface="Verdana" pitchFamily="34" charset="-122"/>
-                <a:cs typeface="Verdana" pitchFamily="34" charset="-120"/>
-              </a:rPr>
-              <a:t>When the deck runs out, count pairs. Most pairs wins.</a:t>
-            </a:r>
-            <a:endParaRPr lang="en-US" sz="1200" dirty="0"/>
-          </a:p>
-        </p:txBody>
-      </p:sp>
-      <p:sp>
-        <p:nvSpPr>
-          <p:cNvPr id="8" name="Text 6"/>
-          <p:cNvSpPr/>
-          <p:nvPr/>
-        </p:nvSpPr>
-        <p:spPr>
-          <a:xfrm>
-            <a:off x="406301" y="2917478"/>
-            <a:ext cx="8498026" cy="213271"/>
-          </a:xfrm>
-          <a:prstGeom prst="rect">
-            <a:avLst/>
-          </a:prstGeom>
-          <a:noFill/>
-          <a:ln/>
-        </p:spPr>
-        <p:txBody>
-          <a:bodyPr wrap="square" lIns="0" tIns="0" rIns="0" bIns="0" rtlCol="0" anchor="t"/>
-          <a:lstStyle/>
-          <a:p>
-            <a:pPr algn="l" indent="0" marL="0">
-              <a:lnSpc>
-                <a:spcPts val="1680"/>
-              </a:lnSpc>
-              <a:spcBef>
-                <a:spcPts val="300"/>
-              </a:spcBef>
-              <a:spcAft>
-                <a:spcPts val="300"/>
-              </a:spcAft>
-              <a:buNone/>
-            </a:pPr>
-            <a:r>
-              <a:rPr lang="en-US" sz="1200" dirty="0">
-                <a:solidFill>
-                  <a:srgbClr val="2C2C2C"/>
-                </a:solidFill>
-                <a:latin typeface="Verdana" pitchFamily="34" charset="0"/>
-                <a:ea typeface="Verdana" pitchFamily="34" charset="-122"/>
-                <a:cs typeface="Verdana" pitchFamily="34" charset="-120"/>
-              </a:rPr>
-              <a:t>Play 2–3 rounds.</a:t>
-            </a:r>
-            <a:endParaRPr lang="en-US" sz="1200" dirty="0"/>
-          </a:p>
-        </p:txBody>
-      </p:sp>
-      <p:sp>
-        <p:nvSpPr>
-          <p:cNvPr id="9" name="Text 7"/>
           <p:cNvSpPr/>
           <p:nvPr/>
         </p:nvSpPr>
@@ -4702,7 +5189,7 @@
                 <a:ea typeface="Georgia" pitchFamily="34" charset="-122"/>
                 <a:cs typeface="Georgia" pitchFamily="34" charset="-120"/>
               </a:rPr>
-              <a:t>Show + chant (5 min)</a:t>
+              <a:t>Story (5 min)</a:t>
             </a:r>
             <a:endParaRPr lang="en-US" sz="1800" dirty="0"/>
           </a:p>
@@ -4716,54 +5203,109 @@
         </p:nvSpPr>
         <p:spPr>
           <a:xfrm>
-            <a:off x="634901" y="883593"/>
-            <a:ext cx="8102798" cy="281880"/>
-          </a:xfrm>
-          <a:prstGeom prst="rect">
+            <a:off x="406301" y="883593"/>
+            <a:ext cx="8331398" cy="2457450"/>
+          </a:xfrm>
+          <a:prstGeom prst="rect">
+            <a:avLst/>
+          </a:prstGeom>
+          <a:solidFill>
+            <a:srgbClr val="FFFFFF"/>
+          </a:solidFill>
+          <a:ln/>
+        </p:spPr>
+        <p:txBody>
+          <a:bodyPr wrap="square" rtlCol="0" anchor="ctr"/>
+          <a:lstStyle/>
+          <a:p>
+            <a:pPr indent="0" marL="0">
+              <a:buNone/>
+            </a:pPr>
+            <a:endParaRPr lang="en-US" dirty="0"/>
+          </a:p>
+        </p:txBody>
+      </p:sp>
+      <p:sp>
+        <p:nvSpPr>
+          <p:cNvPr id="5" name="Shape 3"/>
+          <p:cNvSpPr/>
+          <p:nvPr/>
+        </p:nvSpPr>
+        <p:spPr>
+          <a:xfrm>
+            <a:off x="434876" y="883593"/>
+            <a:ext cx="0" cy="2457450"/>
+          </a:xfrm>
+          <a:prstGeom prst="line">
             <a:avLst/>
           </a:prstGeom>
           <a:noFill/>
+          <a:ln w="57150">
+            <a:solidFill>
+              <a:srgbClr val="E07A5F"/>
+            </a:solidFill>
+            <a:prstDash val="solid"/>
+          </a:ln>
+        </p:spPr>
+      </p:sp>
+      <p:sp>
+        <p:nvSpPr>
+          <p:cNvPr id="6" name="Text 4"/>
+          <p:cNvSpPr/>
+          <p:nvPr/>
+        </p:nvSpPr>
+        <p:spPr>
+          <a:xfrm>
+            <a:off x="692051" y="1074093"/>
+            <a:ext cx="7973389" cy="230981"/>
+          </a:xfrm>
+          <a:prstGeom prst="rect">
+            <a:avLst/>
+          </a:prstGeom>
+          <a:noFill/>
           <a:ln/>
         </p:spPr>
         <p:txBody>
           <a:bodyPr wrap="square" lIns="0" tIns="0" rIns="0" bIns="0" rtlCol="0" anchor="t"/>
           <a:lstStyle/>
           <a:p>
-            <a:pPr algn="l" marL="342900" indent="-342900">
-              <a:lnSpc>
-                <a:spcPts val="1620"/>
-              </a:lnSpc>
-              <a:spcAft>
-                <a:spcPts val="300"/>
-              </a:spcAft>
-              <a:buSzPct val="100000"/>
-              <a:buChar char="•"/>
-            </a:pPr>
-            <a:r>
-              <a:rPr lang="en-US" sz="1200" dirty="0">
+            <a:pPr algn="l" indent="0" marL="0">
+              <a:lnSpc>
+                <a:spcPts val="1820"/>
+              </a:lnSpc>
+              <a:spcBef>
+                <a:spcPts val="300"/>
+              </a:spcBef>
+              <a:spcAft>
+                <a:spcPts val="300"/>
+              </a:spcAft>
+              <a:buNone/>
+            </a:pPr>
+            <a:r>
+              <a:rPr lang="en-US" sz="1300" b="1" i="1" dirty="0">
                 <a:solidFill>
                   <a:srgbClr val="2C2C2C"/>
                 </a:solidFill>
-                <a:latin typeface="Verdana" pitchFamily="34" charset="0"/>
-                <a:ea typeface="Verdana" pitchFamily="34" charset="-122"/>
-                <a:cs typeface="Verdana" pitchFamily="34" charset="-120"/>
-              </a:rPr>
-              <a:t>"Who won a round?" — winner shares ONE friend pair they made.</a:t>
-            </a:r>
-            <a:endParaRPr lang="en-US" sz="1200" dirty="0"/>
-          </a:p>
-        </p:txBody>
-      </p:sp>
-      <p:sp>
-        <p:nvSpPr>
-          <p:cNvPr id="5" name="Text 3"/>
-          <p:cNvSpPr/>
-          <p:nvPr/>
-        </p:nvSpPr>
-        <p:spPr>
-          <a:xfrm>
-            <a:off x="406301" y="1254323"/>
-            <a:ext cx="8498026" cy="213271"/>
+                <a:latin typeface="Georgia" pitchFamily="34" charset="0"/>
+                <a:ea typeface="Georgia" pitchFamily="34" charset="-122"/>
+                <a:cs typeface="Georgia" pitchFamily="34" charset="-120"/>
+              </a:rPr>
+              <a:t>The Friend Game</a:t>
+            </a:r>
+            <a:endParaRPr lang="en-US" sz="1300" dirty="0"/>
+          </a:p>
+        </p:txBody>
+      </p:sp>
+      <p:sp>
+        <p:nvSpPr>
+          <p:cNvPr id="7" name="Text 5"/>
+          <p:cNvSpPr/>
+          <p:nvPr/>
+        </p:nvSpPr>
+        <p:spPr>
+          <a:xfrm>
+            <a:off x="692051" y="1343174"/>
+            <a:ext cx="7973389" cy="230981"/>
           </a:xfrm>
           <a:prstGeom prst="rect">
             <a:avLst/>
@@ -4777,7 +5319,7 @@
           <a:p>
             <a:pPr algn="l" indent="0" marL="0">
               <a:lnSpc>
-                <a:spcPts val="1680"/>
+                <a:spcPts val="1820"/>
               </a:lnSpc>
               <a:spcBef>
                 <a:spcPts val="300"/>
@@ -4788,19 +5330,44 @@
               <a:buNone/>
             </a:pPr>
             <a:r>
-              <a:rPr lang="en-US" sz="1200" dirty="0">
+              <a:rPr lang="en-US" sz="1300" i="1" dirty="0">
                 <a:solidFill>
                   <a:srgbClr val="2C2C2C"/>
                 </a:solidFill>
-                <a:latin typeface="Verdana" pitchFamily="34" charset="0"/>
-                <a:ea typeface="Verdana" pitchFamily="34" charset="-122"/>
-                <a:cs typeface="Verdana" pitchFamily="34" charset="-120"/>
-              </a:rPr>
-              <a:t>– Class chants the pair: </a:t>
-            </a:r>
+                <a:latin typeface="Georgia" pitchFamily="34" charset="0"/>
+                <a:ea typeface="Georgia" pitchFamily="34" charset="-122"/>
+                <a:cs typeface="Georgia" pitchFamily="34" charset="-120"/>
+              </a:rPr>
+              <a:t>Ten little ants lived on a leaf. Sometimes they walked off in groups.</a:t>
+            </a:r>
+            <a:endParaRPr lang="en-US" sz="1300" dirty="0"/>
+          </a:p>
+        </p:txBody>
+      </p:sp>
+      <p:sp>
+        <p:nvSpPr>
+          <p:cNvPr id="8" name="Text 6"/>
+          <p:cNvSpPr/>
+          <p:nvPr/>
+        </p:nvSpPr>
+        <p:spPr>
+          <a:xfrm>
+            <a:off x="692051" y="1612255"/>
+            <a:ext cx="7973389" cy="461963"/>
+          </a:xfrm>
+          <a:prstGeom prst="rect">
+            <a:avLst/>
+          </a:prstGeom>
+          <a:noFill/>
+          <a:ln/>
+        </p:spPr>
+        <p:txBody>
+          <a:bodyPr wrap="square" lIns="0" tIns="0" rIns="0" bIns="0" rtlCol="0" anchor="t"/>
+          <a:lstStyle/>
+          <a:p>
             <a:pPr algn="l" indent="0" marL="0">
               <a:lnSpc>
-                <a:spcPts val="1680"/>
+                <a:spcPts val="1820"/>
               </a:lnSpc>
               <a:spcBef>
                 <a:spcPts val="300"/>
@@ -4811,19 +5378,19 @@
               <a:buNone/>
             </a:pPr>
             <a:r>
-              <a:rPr lang="en-US" sz="1200" i="1" dirty="0">
+              <a:rPr lang="en-US" sz="1300" dirty="0">
                 <a:solidFill>
                   <a:srgbClr val="2C2C2C"/>
                 </a:solidFill>
-                <a:latin typeface="Verdana" pitchFamily="34" charset="0"/>
-                <a:ea typeface="Verdana" pitchFamily="34" charset="-122"/>
-                <a:cs typeface="Verdana" pitchFamily="34" charset="-120"/>
-              </a:rPr>
-              <a:t>"6 and 4 are friends!"</a:t>
+                <a:latin typeface="Georgia" pitchFamily="34" charset="0"/>
+                <a:ea typeface="Georgia" pitchFamily="34" charset="-122"/>
+                <a:cs typeface="Georgia" pitchFamily="34" charset="-120"/>
+              </a:rPr>
+              <a:t>One day, 3 ants walked off. </a:t>
             </a:r>
             <a:pPr algn="l" indent="0" marL="0">
               <a:lnSpc>
-                <a:spcPts val="1680"/>
+                <a:spcPts val="1820"/>
               </a:lnSpc>
               <a:spcBef>
                 <a:spcPts val="300"/>
@@ -4834,23 +5401,330 @@
               <a:buNone/>
             </a:pPr>
             <a:r>
-              <a:rPr lang="en-US" sz="1200" dirty="0">
+              <a:rPr lang="en-US" sz="1300" i="1" dirty="0">
                 <a:solidFill>
                   <a:srgbClr val="2C2C2C"/>
                 </a:solidFill>
-                <a:latin typeface="Verdana" pitchFamily="34" charset="0"/>
-                <a:ea typeface="Verdana" pitchFamily="34" charset="-122"/>
-                <a:cs typeface="Verdana" pitchFamily="34" charset="-120"/>
-              </a:rPr>
-              <a:t> – Close with the daily chant.</a:t>
-            </a:r>
-            <a:endParaRPr lang="en-US" sz="1200" dirty="0"/>
-          </a:p>
-        </p:txBody>
-      </p:sp>
-      <p:sp>
-        <p:nvSpPr>
-          <p:cNvPr id="6" name="Text 4"/>
+                <a:latin typeface="Georgia" pitchFamily="34" charset="0"/>
+                <a:ea typeface="Georgia" pitchFamily="34" charset="-122"/>
+                <a:cs typeface="Georgia" pitchFamily="34" charset="-120"/>
+              </a:rPr>
+              <a:t>(Hold up 3 fingers.)</a:t>
+            </a:r>
+            <a:pPr algn="l" indent="0" marL="0">
+              <a:lnSpc>
+                <a:spcPts val="1820"/>
+              </a:lnSpc>
+              <a:spcBef>
+                <a:spcPts val="300"/>
+              </a:spcBef>
+              <a:spcAft>
+                <a:spcPts val="300"/>
+              </a:spcAft>
+              <a:buNone/>
+            </a:pPr>
+            <a:r>
+              <a:rPr lang="en-US" sz="1300" dirty="0">
+                <a:solidFill>
+                  <a:srgbClr val="2C2C2C"/>
+                </a:solidFill>
+                <a:latin typeface="Georgia" pitchFamily="34" charset="0"/>
+                <a:ea typeface="Georgia" pitchFamily="34" charset="-122"/>
+                <a:cs typeface="Georgia" pitchFamily="34" charset="-120"/>
+              </a:rPr>
+              <a:t> How many were left behind on the leaf? </a:t>
+            </a:r>
+            <a:pPr algn="l" indent="0" marL="0">
+              <a:lnSpc>
+                <a:spcPts val="1820"/>
+              </a:lnSpc>
+              <a:spcBef>
+                <a:spcPts val="300"/>
+              </a:spcBef>
+              <a:spcAft>
+                <a:spcPts val="300"/>
+              </a:spcAft>
+              <a:buNone/>
+            </a:pPr>
+            <a:r>
+              <a:rPr lang="en-US" sz="1300" i="1" dirty="0">
+                <a:solidFill>
+                  <a:srgbClr val="2C2C2C"/>
+                </a:solidFill>
+                <a:latin typeface="Georgia" pitchFamily="34" charset="0"/>
+                <a:ea typeface="Georgia" pitchFamily="34" charset="-122"/>
+                <a:cs typeface="Georgia" pitchFamily="34" charset="-120"/>
+              </a:rPr>
+              <a:t>(Wait. Children call out: 7!)</a:t>
+            </a:r>
+            <a:endParaRPr lang="en-US" sz="1300" dirty="0"/>
+          </a:p>
+        </p:txBody>
+      </p:sp>
+      <p:sp>
+        <p:nvSpPr>
+          <p:cNvPr id="9" name="Text 7"/>
+          <p:cNvSpPr/>
+          <p:nvPr/>
+        </p:nvSpPr>
+        <p:spPr>
+          <a:xfrm>
+            <a:off x="692051" y="2112318"/>
+            <a:ext cx="7973389" cy="230981"/>
+          </a:xfrm>
+          <a:prstGeom prst="rect">
+            <a:avLst/>
+          </a:prstGeom>
+          <a:noFill/>
+          <a:ln/>
+        </p:spPr>
+        <p:txBody>
+          <a:bodyPr wrap="square" lIns="0" tIns="0" rIns="0" bIns="0" rtlCol="0" anchor="t"/>
+          <a:lstStyle/>
+          <a:p>
+            <a:pPr algn="l" indent="0" marL="0">
+              <a:lnSpc>
+                <a:spcPts val="1820"/>
+              </a:lnSpc>
+              <a:spcBef>
+                <a:spcPts val="300"/>
+              </a:spcBef>
+              <a:spcAft>
+                <a:spcPts val="300"/>
+              </a:spcAft>
+              <a:buNone/>
+            </a:pPr>
+            <a:r>
+              <a:rPr lang="en-US" sz="1300" i="1" dirty="0">
+                <a:solidFill>
+                  <a:srgbClr val="2C2C2C"/>
+                </a:solidFill>
+                <a:latin typeface="Georgia" pitchFamily="34" charset="0"/>
+                <a:ea typeface="Georgia" pitchFamily="34" charset="-122"/>
+                <a:cs typeface="Georgia" pitchFamily="34" charset="-120"/>
+              </a:rPr>
+              <a:t>Yes! 3 and 7 are friends. They always make 10 together.</a:t>
+            </a:r>
+            <a:endParaRPr lang="en-US" sz="1300" dirty="0"/>
+          </a:p>
+        </p:txBody>
+      </p:sp>
+      <p:sp>
+        <p:nvSpPr>
+          <p:cNvPr id="10" name="Text 8"/>
+          <p:cNvSpPr/>
+          <p:nvPr/>
+        </p:nvSpPr>
+        <p:spPr>
+          <a:xfrm>
+            <a:off x="692051" y="2381399"/>
+            <a:ext cx="7973389" cy="230981"/>
+          </a:xfrm>
+          <a:prstGeom prst="rect">
+            <a:avLst/>
+          </a:prstGeom>
+          <a:noFill/>
+          <a:ln/>
+        </p:spPr>
+        <p:txBody>
+          <a:bodyPr wrap="square" lIns="0" tIns="0" rIns="0" bIns="0" rtlCol="0" anchor="t"/>
+          <a:lstStyle/>
+          <a:p>
+            <a:pPr algn="l" indent="0" marL="0">
+              <a:lnSpc>
+                <a:spcPts val="1820"/>
+              </a:lnSpc>
+              <a:spcBef>
+                <a:spcPts val="300"/>
+              </a:spcBef>
+              <a:spcAft>
+                <a:spcPts val="300"/>
+              </a:spcAft>
+              <a:buNone/>
+            </a:pPr>
+            <a:r>
+              <a:rPr lang="en-US" sz="1300" dirty="0">
+                <a:solidFill>
+                  <a:srgbClr val="2C2C2C"/>
+                </a:solidFill>
+                <a:latin typeface="Georgia" pitchFamily="34" charset="0"/>
+                <a:ea typeface="Georgia" pitchFamily="34" charset="-122"/>
+                <a:cs typeface="Georgia" pitchFamily="34" charset="-120"/>
+              </a:rPr>
+              <a:t>Another day, 6 ants walked off. </a:t>
+            </a:r>
+            <a:pPr algn="l" indent="0" marL="0">
+              <a:lnSpc>
+                <a:spcPts val="1820"/>
+              </a:lnSpc>
+              <a:spcBef>
+                <a:spcPts val="300"/>
+              </a:spcBef>
+              <a:spcAft>
+                <a:spcPts val="300"/>
+              </a:spcAft>
+              <a:buNone/>
+            </a:pPr>
+            <a:r>
+              <a:rPr lang="en-US" sz="1300" i="1" dirty="0">
+                <a:solidFill>
+                  <a:srgbClr val="2C2C2C"/>
+                </a:solidFill>
+                <a:latin typeface="Georgia" pitchFamily="34" charset="0"/>
+                <a:ea typeface="Georgia" pitchFamily="34" charset="-122"/>
+                <a:cs typeface="Georgia" pitchFamily="34" charset="-120"/>
+              </a:rPr>
+              <a:t>(Hold up 6.)</a:t>
+            </a:r>
+            <a:pPr algn="l" indent="0" marL="0">
+              <a:lnSpc>
+                <a:spcPts val="1820"/>
+              </a:lnSpc>
+              <a:spcBef>
+                <a:spcPts val="300"/>
+              </a:spcBef>
+              <a:spcAft>
+                <a:spcPts val="300"/>
+              </a:spcAft>
+              <a:buNone/>
+            </a:pPr>
+            <a:r>
+              <a:rPr lang="en-US" sz="1300" dirty="0">
+                <a:solidFill>
+                  <a:srgbClr val="2C2C2C"/>
+                </a:solidFill>
+                <a:latin typeface="Georgia" pitchFamily="34" charset="0"/>
+                <a:ea typeface="Georgia" pitchFamily="34" charset="-122"/>
+                <a:cs typeface="Georgia" pitchFamily="34" charset="-120"/>
+              </a:rPr>
+              <a:t> How many on the leaf? </a:t>
+            </a:r>
+            <a:pPr algn="l" indent="0" marL="0">
+              <a:lnSpc>
+                <a:spcPts val="1820"/>
+              </a:lnSpc>
+              <a:spcBef>
+                <a:spcPts val="300"/>
+              </a:spcBef>
+              <a:spcAft>
+                <a:spcPts val="300"/>
+              </a:spcAft>
+              <a:buNone/>
+            </a:pPr>
+            <a:r>
+              <a:rPr lang="en-US" sz="1300" i="1" dirty="0">
+                <a:solidFill>
+                  <a:srgbClr val="2C2C2C"/>
+                </a:solidFill>
+                <a:latin typeface="Georgia" pitchFamily="34" charset="0"/>
+                <a:ea typeface="Georgia" pitchFamily="34" charset="-122"/>
+                <a:cs typeface="Georgia" pitchFamily="34" charset="-120"/>
+              </a:rPr>
+              <a:t>(4!)</a:t>
+            </a:r>
+            <a:endParaRPr lang="en-US" sz="1300" dirty="0"/>
+          </a:p>
+        </p:txBody>
+      </p:sp>
+      <p:sp>
+        <p:nvSpPr>
+          <p:cNvPr id="11" name="Text 9"/>
+          <p:cNvSpPr/>
+          <p:nvPr/>
+        </p:nvSpPr>
+        <p:spPr>
+          <a:xfrm>
+            <a:off x="692051" y="2650480"/>
+            <a:ext cx="7973389" cy="230981"/>
+          </a:xfrm>
+          <a:prstGeom prst="rect">
+            <a:avLst/>
+          </a:prstGeom>
+          <a:noFill/>
+          <a:ln/>
+        </p:spPr>
+        <p:txBody>
+          <a:bodyPr wrap="square" lIns="0" tIns="0" rIns="0" bIns="0" rtlCol="0" anchor="t"/>
+          <a:lstStyle/>
+          <a:p>
+            <a:pPr algn="l" indent="0" marL="0">
+              <a:lnSpc>
+                <a:spcPts val="1820"/>
+              </a:lnSpc>
+              <a:spcBef>
+                <a:spcPts val="300"/>
+              </a:spcBef>
+              <a:spcAft>
+                <a:spcPts val="300"/>
+              </a:spcAft>
+              <a:buNone/>
+            </a:pPr>
+            <a:r>
+              <a:rPr lang="en-US" sz="1300" i="1" dirty="0">
+                <a:solidFill>
+                  <a:srgbClr val="2C2C2C"/>
+                </a:solidFill>
+                <a:latin typeface="Georgia" pitchFamily="34" charset="0"/>
+                <a:ea typeface="Georgia" pitchFamily="34" charset="-122"/>
+                <a:cs typeface="Georgia" pitchFamily="34" charset="-120"/>
+              </a:rPr>
+              <a:t>6 and 4 are friends. Always 10.</a:t>
+            </a:r>
+            <a:endParaRPr lang="en-US" sz="1300" dirty="0"/>
+          </a:p>
+        </p:txBody>
+      </p:sp>
+      <p:sp>
+        <p:nvSpPr>
+          <p:cNvPr id="12" name="Text 10"/>
+          <p:cNvSpPr/>
+          <p:nvPr/>
+        </p:nvSpPr>
+        <p:spPr>
+          <a:xfrm>
+            <a:off x="692051" y="2919561"/>
+            <a:ext cx="7973389" cy="230981"/>
+          </a:xfrm>
+          <a:prstGeom prst="rect">
+            <a:avLst/>
+          </a:prstGeom>
+          <a:noFill/>
+          <a:ln/>
+        </p:spPr>
+        <p:txBody>
+          <a:bodyPr wrap="square" lIns="0" tIns="0" rIns="0" bIns="0" rtlCol="0" anchor="t"/>
+          <a:lstStyle/>
+          <a:p>
+            <a:pPr algn="l" indent="0" marL="0">
+              <a:lnSpc>
+                <a:spcPts val="1820"/>
+              </a:lnSpc>
+              <a:spcBef>
+                <a:spcPts val="300"/>
+              </a:spcBef>
+              <a:spcAft>
+                <a:spcPts val="300"/>
+              </a:spcAft>
+              <a:buNone/>
+            </a:pPr>
+            <a:r>
+              <a:rPr lang="en-US" sz="1300" i="1" dirty="0">
+                <a:solidFill>
+                  <a:srgbClr val="2C2C2C"/>
+                </a:solidFill>
+                <a:latin typeface="Georgia" pitchFamily="34" charset="0"/>
+                <a:ea typeface="Georgia" pitchFamily="34" charset="-122"/>
+                <a:cs typeface="Georgia" pitchFamily="34" charset="-120"/>
+              </a:rPr>
+              <a:t>Every number from 0 to 10 has a friend. We'll meet them all today.</a:t>
+            </a:r>
+            <a:endParaRPr lang="en-US" sz="1300" dirty="0"/>
+          </a:p>
+        </p:txBody>
+      </p:sp>
+      <p:sp>
+        <p:nvSpPr>
+          <p:cNvPr id="13" name="Text 11"/>
           <p:cNvSpPr/>
           <p:nvPr/>
         </p:nvSpPr>
@@ -5000,7 +5874,7 @@
                 <a:ea typeface="Georgia" pitchFamily="34" charset="-122"/>
                 <a:cs typeface="Georgia" pitchFamily="34" charset="-120"/>
               </a:rPr>
-              <a:t>Homework / take-home</a:t>
+              <a:t>Card game: Make Ten (20 min)</a:t>
             </a:r>
             <a:endParaRPr lang="en-US" sz="1800" dirty="0"/>
           </a:p>
@@ -5040,7 +5914,7 @@
               <a:buNone/>
             </a:pPr>
             <a:r>
-              <a:rPr lang="en-US" sz="1200" dirty="0">
+              <a:rPr lang="en-US" sz="1200" b="1" dirty="0">
                 <a:solidFill>
                   <a:srgbClr val="2C2C2C"/>
                 </a:solidFill>
@@ -5048,7 +5922,7 @@
                 <a:ea typeface="Verdana" pitchFamily="34" charset="-122"/>
                 <a:cs typeface="Verdana" pitchFamily="34" charset="-120"/>
               </a:rPr>
-              <a:t>– Practise the chant with a sibling or parent. Win a round of Make Ten with family!</a:t>
+              <a:t>How to play (paired):</a:t>
             </a:r>
             <a:endParaRPr lang="en-US" sz="1200" dirty="0"/>
           </a:p>
@@ -5206,7 +6080,7 @@
                 <a:ea typeface="Georgia" pitchFamily="34" charset="-122"/>
                 <a:cs typeface="Georgia" pitchFamily="34" charset="-120"/>
               </a:rPr>
-              <a:t>Differentiation</a:t>
+              <a:t>Card game: Make Ten (20 min) (cont.)</a:t>
             </a:r>
             <a:endParaRPr lang="en-US" sz="1800" dirty="0"/>
           </a:p>
@@ -5244,7 +6118,7 @@
               <a:buChar char="•"/>
             </a:pPr>
             <a:r>
-              <a:rPr lang="en-US" sz="1200" b="1" dirty="0">
+              <a:rPr lang="en-US" sz="1200" dirty="0">
                 <a:solidFill>
                   <a:srgbClr val="2C2C2C"/>
                 </a:solidFill>
@@ -5252,16 +6126,20 @@
                 <a:ea typeface="Verdana" pitchFamily="34" charset="-122"/>
                 <a:cs typeface="Verdana" pitchFamily="34" charset="-120"/>
               </a:rPr>
-              <a:t>Tier up:</a:t>
-            </a:r>
-            <a:pPr algn="l" indent="0" marL="0">
+              <a:t>Shuffle. Deal 5 cards to each player. Put 5 face-up in the middle.</a:t>
+            </a:r>
+            <a:endParaRPr lang="en-US" sz="1200" dirty="0"/>
+          </a:p>
+          <a:p>
+            <a:pPr algn="l" marL="342900" indent="-342900">
               <a:lnSpc>
                 <a:spcPts val="1620"/>
               </a:lnSpc>
               <a:spcAft>
                 <a:spcPts val="300"/>
               </a:spcAft>
-              <a:buNone/>
+              <a:buSzPct val="100000"/>
+              <a:buChar char="•"/>
             </a:pPr>
             <a:r>
               <a:rPr lang="en-US" sz="1200" dirty="0">
@@ -5272,10 +6150,32 @@
                 <a:ea typeface="Verdana" pitchFamily="34" charset="-122"/>
                 <a:cs typeface="Verdana" pitchFamily="34" charset="-120"/>
               </a:rPr>
-              <a:t> Use 0–9 cards including 0+10 pairs.</a:t>
+              <a:t>On your turn:</a:t>
             </a:r>
             <a:endParaRPr lang="en-US" sz="1200" dirty="0"/>
           </a:p>
+        </p:txBody>
+      </p:sp>
+      <p:sp>
+        <p:nvSpPr>
+          <p:cNvPr id="5" name="Text 3"/>
+          <p:cNvSpPr/>
+          <p:nvPr/>
+        </p:nvSpPr>
+        <p:spPr>
+          <a:xfrm>
+            <a:off x="634901" y="1510754"/>
+            <a:ext cx="8102798" cy="1013222"/>
+          </a:xfrm>
+          <a:prstGeom prst="rect">
+            <a:avLst/>
+          </a:prstGeom>
+          <a:noFill/>
+          <a:ln/>
+        </p:spPr>
+        <p:txBody>
+          <a:bodyPr wrap="square" lIns="0" tIns="0" rIns="0" bIns="0" rtlCol="0" anchor="t"/>
+          <a:lstStyle/>
           <a:p>
             <a:pPr algn="l" marL="342900" indent="-342900">
               <a:lnSpc>
@@ -5288,7 +6188,7 @@
               <a:buChar char="•"/>
             </a:pPr>
             <a:r>
-              <a:rPr lang="en-US" sz="1200" b="1" dirty="0">
+              <a:rPr lang="en-US" sz="1200" dirty="0">
                 <a:solidFill>
                   <a:srgbClr val="2C2C2C"/>
                 </a:solidFill>
@@ -5296,16 +6196,20 @@
                 <a:ea typeface="Verdana" pitchFamily="34" charset="-122"/>
                 <a:cs typeface="Verdana" pitchFamily="34" charset="-120"/>
               </a:rPr>
-              <a:t>Tier down:</a:t>
-            </a:r>
-            <a:pPr algn="l" indent="0" marL="0">
+              <a:t>Look at your hand and the middle.</a:t>
+            </a:r>
+            <a:endParaRPr lang="en-US" sz="1200" dirty="0"/>
+          </a:p>
+          <a:p>
+            <a:pPr algn="l" marL="342900" indent="-342900">
               <a:lnSpc>
                 <a:spcPts val="1620"/>
               </a:lnSpc>
               <a:spcAft>
                 <a:spcPts val="300"/>
               </a:spcAft>
-              <a:buNone/>
+              <a:buSzPct val="100000"/>
+              <a:buChar char="•"/>
             </a:pPr>
             <a:r>
               <a:rPr lang="en-US" sz="1200" dirty="0">
@@ -5316,15 +6220,133 @@
                 <a:ea typeface="Verdana" pitchFamily="34" charset="-122"/>
                 <a:cs typeface="Verdana" pitchFamily="34" charset="-120"/>
               </a:rPr>
-              <a:t> Use cards 1–6 to keep pairs simple.</a:t>
+              <a:t>Find two cards that are friends (add to 10).</a:t>
             </a:r>
             <a:endParaRPr lang="en-US" sz="1200" dirty="0"/>
           </a:p>
-        </p:txBody>
-      </p:sp>
-      <p:sp>
-        <p:nvSpPr>
-          <p:cNvPr id="5" name="Text 3"/>
+          <a:p>
+            <a:pPr algn="l" marL="342900" indent="-342900">
+              <a:lnSpc>
+                <a:spcPts val="1620"/>
+              </a:lnSpc>
+              <a:spcAft>
+                <a:spcPts val="300"/>
+              </a:spcAft>
+              <a:buSzPct val="100000"/>
+              <a:buChar char="•"/>
+            </a:pPr>
+            <a:r>
+              <a:rPr lang="en-US" sz="1200" dirty="0">
+                <a:solidFill>
+                  <a:srgbClr val="2C2C2C"/>
+                </a:solidFill>
+                <a:latin typeface="Verdana" pitchFamily="34" charset="0"/>
+                <a:ea typeface="Verdana" pitchFamily="34" charset="-122"/>
+                <a:cs typeface="Verdana" pitchFamily="34" charset="-120"/>
+              </a:rPr>
+              <a:t>Take both. Put in your pile.</a:t>
+            </a:r>
+            <a:endParaRPr lang="en-US" sz="1200" dirty="0"/>
+          </a:p>
+          <a:p>
+            <a:pPr algn="l" marL="342900" indent="-342900">
+              <a:lnSpc>
+                <a:spcPts val="1620"/>
+              </a:lnSpc>
+              <a:spcAft>
+                <a:spcPts val="300"/>
+              </a:spcAft>
+              <a:buSzPct val="100000"/>
+              <a:buChar char="•"/>
+            </a:pPr>
+            <a:r>
+              <a:rPr lang="en-US" sz="1200" dirty="0">
+                <a:solidFill>
+                  <a:srgbClr val="2C2C2C"/>
+                </a:solidFill>
+                <a:latin typeface="Verdana" pitchFamily="34" charset="0"/>
+                <a:ea typeface="Verdana" pitchFamily="34" charset="-122"/>
+                <a:cs typeface="Verdana" pitchFamily="34" charset="-120"/>
+              </a:rPr>
+              <a:t>Draw 1 from the deck.</a:t>
+            </a:r>
+            <a:endParaRPr lang="en-US" sz="1200" dirty="0"/>
+          </a:p>
+        </p:txBody>
+      </p:sp>
+      <p:sp>
+        <p:nvSpPr>
+          <p:cNvPr id="6" name="Text 4"/>
+          <p:cNvSpPr/>
+          <p:nvPr/>
+        </p:nvSpPr>
+        <p:spPr>
+          <a:xfrm>
+            <a:off x="634901" y="2625477"/>
+            <a:ext cx="8102798" cy="525661"/>
+          </a:xfrm>
+          <a:prstGeom prst="rect">
+            <a:avLst/>
+          </a:prstGeom>
+          <a:noFill/>
+          <a:ln/>
+        </p:spPr>
+        <p:txBody>
+          <a:bodyPr wrap="square" lIns="0" tIns="0" rIns="0" bIns="0" rtlCol="0" anchor="t"/>
+          <a:lstStyle/>
+          <a:p>
+            <a:pPr algn="l" marL="342900" indent="-342900">
+              <a:lnSpc>
+                <a:spcPts val="1620"/>
+              </a:lnSpc>
+              <a:spcAft>
+                <a:spcPts val="300"/>
+              </a:spcAft>
+              <a:buSzPct val="100000"/>
+              <a:buChar char="•"/>
+            </a:pPr>
+            <a:r>
+              <a:rPr lang="en-US" sz="1200" dirty="0">
+                <a:solidFill>
+                  <a:srgbClr val="2C2C2C"/>
+                </a:solidFill>
+                <a:latin typeface="Verdana" pitchFamily="34" charset="0"/>
+                <a:ea typeface="Verdana" pitchFamily="34" charset="-122"/>
+                <a:cs typeface="Verdana" pitchFamily="34" charset="-120"/>
+              </a:rPr>
+              <a:t>If you can't make 10, place 1 card in the middle. End turn.</a:t>
+            </a:r>
+            <a:endParaRPr lang="en-US" sz="1200" dirty="0"/>
+          </a:p>
+          <a:p>
+            <a:pPr algn="l" marL="342900" indent="-342900">
+              <a:lnSpc>
+                <a:spcPts val="1620"/>
+              </a:lnSpc>
+              <a:spcAft>
+                <a:spcPts val="300"/>
+              </a:spcAft>
+              <a:buSzPct val="100000"/>
+              <a:buChar char="•"/>
+            </a:pPr>
+            <a:r>
+              <a:rPr lang="en-US" sz="1200" dirty="0">
+                <a:solidFill>
+                  <a:srgbClr val="2C2C2C"/>
+                </a:solidFill>
+                <a:latin typeface="Verdana" pitchFamily="34" charset="0"/>
+                <a:ea typeface="Verdana" pitchFamily="34" charset="-122"/>
+                <a:cs typeface="Verdana" pitchFamily="34" charset="-120"/>
+              </a:rPr>
+              <a:t>When the deck runs out, count pairs. Most pairs wins.</a:t>
+            </a:r>
+            <a:endParaRPr lang="en-US" sz="1200" dirty="0"/>
+          </a:p>
+        </p:txBody>
+      </p:sp>
+      <p:sp>
+        <p:nvSpPr>
+          <p:cNvPr id="7" name="Text 5"/>
           <p:cNvSpPr/>
           <p:nvPr/>
         </p:nvSpPr>
